--- a/Topic_D/Exam_Practice/TD-L09_Speaking_Workshop_Applications_and_Interviews.pptx
+++ b/Topic_D/Exam_Practice/TD-L09_Speaking_Workshop_Applications_and_Interviews.pptx
@@ -615,7 +615,11 @@
           <a:lstStyle/>
           <a:p>
             <a:r>
-              <a:rPr lang="en-US" dirty="0"/>
+              <a:rPr lang="ar-SA" dirty="0">
+                <a:latin typeface="Amiri" pitchFamily="2" charset="-78"/>
+                <a:ea typeface="Amiri" pitchFamily="2" charset="-78"/>
+                <a:cs typeface="Amiri" pitchFamily="2" charset="-78"/>
+              </a:rPr>
               <a:t>ROLE PLAY C (Develop) — a volunteering interview.
 SET-UP IN THE BREAKOUT ROOM: A = examiner (reads the left column ONLY — the questions, in order), B = candidate (sees the task column; Core may use the help column), C = observer (ticks the feedback checklist). 1 minute preparation, about 3 minutes speaking, 1 minute feedback, then rotate.
 Task ! is the unexpected question: in the exam the candidate has not seen it — the examiner should read it without warning.
@@ -707,7 +711,11 @@
           <a:lstStyle/>
           <a:p>
             <a:r>
-              <a:rPr lang="en-US" dirty="0"/>
+              <a:rPr lang="ar-SA" dirty="0">
+                <a:latin typeface="Amiri" pitchFamily="2" charset="-78"/>
+                <a:ea typeface="Amiri" pitchFamily="2" charset="-78"/>
+                <a:cs typeface="Amiri" pitchFamily="2" charset="-78"/>
+              </a:rPr>
               <a:t>ROLE PLAY D (Stretch) — a competitive interview.
 SET-UP IN THE BREAKOUT ROOM: A = examiner (reads the left column ONLY — the questions, in order), B = candidate (sees the task column; Core may use the help column), C = observer (ticks the feedback checklist). 1 minute preparation, about 3 minutes speaking, 1 minute feedback, then rotate.
 Task ! is the unexpected question: in the exam the candidate has not seen it — the examiner should read it without warning.
@@ -1243,7 +1251,11 @@
           <a:lstStyle/>
           <a:p>
             <a:r>
-              <a:rPr lang="en-US" dirty="0"/>
+              <a:rPr lang="ar-SA" dirty="0">
+                <a:latin typeface="Amiri" pitchFamily="2" charset="-78"/>
+                <a:ea typeface="Amiri" pitchFamily="2" charset="-78"/>
+                <a:cs typeface="Amiri" pitchFamily="2" charset="-78"/>
+              </a:rPr>
               <a:t>TOPIC CONVERSATION — Core. Examiner asks the questions in order and may add “لِمَاذَا؟ / هَلْ يُمْكِنُ أَنْ تَشْرَحَ أَكْثَرَ؟” to push for more. Candidate aims for one full sentence per question.
 </a:t>
             </a:r>
@@ -1332,7 +1344,11 @@
           <a:lstStyle/>
           <a:p>
             <a:r>
-              <a:rPr lang="en-US" dirty="0"/>
+              <a:rPr lang="ar-SA" dirty="0">
+                <a:latin typeface="Amiri" pitchFamily="2" charset="-78"/>
+                <a:ea typeface="Amiri" pitchFamily="2" charset="-78"/>
+                <a:cs typeface="Amiri" pitchFamily="2" charset="-78"/>
+              </a:rPr>
               <a:t>TOPIC CONVERSATION — Develop. Examiner asks the questions in order and may add “لِمَاذَا؟ / هَلْ يُمْكِنُ أَنْ تَشْرَحَ أَكْثَرَ؟” to push for more. Candidate aims for two or three sentences, with past experience and object pronouns.
 </a:t>
             </a:r>
@@ -1421,7 +1437,11 @@
           <a:lstStyle/>
           <a:p>
             <a:r>
-              <a:rPr lang="en-US" dirty="0"/>
+              <a:rPr lang="ar-SA" dirty="0">
+                <a:latin typeface="Amiri" pitchFamily="2" charset="-78"/>
+                <a:ea typeface="Amiri" pitchFamily="2" charset="-78"/>
+                <a:cs typeface="Amiri" pitchFamily="2" charset="-78"/>
+              </a:rPr>
               <a:t>TOPIC CONVERSATION — Stretch. Examiner asks the questions in order and may add “لِمَاذَا؟ / هَلْ يُمْكِنُ أَنْ تَشْرَحَ أَكْثَرَ؟” to push for more. Candidate aims for a developed answer: opinion, balance, concession and a conditional.
 </a:t>
             </a:r>
@@ -1510,7 +1530,11 @@
           <a:lstStyle/>
           <a:p>
             <a:r>
-              <a:rPr lang="en-US" dirty="0"/>
+              <a:rPr lang="ar-SA" dirty="0">
+                <a:latin typeface="Amiri" pitchFamily="2" charset="-78"/>
+                <a:ea typeface="Amiri" pitchFamily="2" charset="-78"/>
+                <a:cs typeface="Amiri" pitchFamily="2" charset="-78"/>
+              </a:rPr>
               <a:t>WELCOME (1 min) — while students join.
 • Greet each student by name as they arrive: السَّلَامُ عَلَيْكُمْ. Take the register (Pastoral Tracker: attendance 0/1).
 • 2-MINUTE CHECK-IN (SEND training): a private chat to any student who seemed unsettled last lesson — “Are you okay today? 👍 / 👎”.
@@ -2224,7 +2248,11 @@
           <a:lstStyle/>
           <a:p>
             <a:r>
-              <a:rPr lang="en-US" dirty="0"/>
+              <a:rPr lang="ar-SA" dirty="0">
+                <a:latin typeface="Amiri" pitchFamily="2" charset="-78"/>
+                <a:ea typeface="Amiri" pitchFamily="2" charset="-78"/>
+                <a:cs typeface="Amiri" pitchFamily="2" charset="-78"/>
+              </a:rPr>
               <a:t>TEACH (3 min). Role play = precise and complete; conversation = develop. Choral repetition of the repair phrases. To a girl: تُعِيدِي.</a:t>
             </a:r>
             <a:endParaRPr lang="en-US" dirty="0"/>
@@ -2312,7 +2340,11 @@
           <a:lstStyle/>
           <a:p>
             <a:r>
-              <a:rPr lang="en-US" dirty="0"/>
+              <a:rPr lang="ar-SA" dirty="0">
+                <a:latin typeface="Amiri" pitchFamily="2" charset="-78"/>
+                <a:ea typeface="Amiri" pitchFamily="2" charset="-78"/>
+                <a:cs typeface="Amiri" pitchFamily="2" charset="-78"/>
+              </a:rPr>
               <a:t>LANGUAGE BANK (2 min) — formal register: أَوَدُّ أَنْ أَتَقَدَّمَ لِوَظِيفَةِ … · يَسُرُّنِي أَنْ أُرْسِلَ لَكُمْ سِيرَتِي الذَّاتِيَّةَ. In an interview use حَضْرَتُكَ / حَضْرَتُكِ for “you” and finish with شُكْرًا عَلَى وَقْتِكُمْ.</a:t>
             </a:r>
             <a:endParaRPr lang="en-US" dirty="0"/>
@@ -2400,7 +2432,11 @@
           <a:lstStyle/>
           <a:p>
             <a:r>
-              <a:rPr lang="en-US" dirty="0"/>
+              <a:rPr lang="ar-SA" dirty="0">
+                <a:latin typeface="Amiri" pitchFamily="2" charset="-78"/>
+                <a:ea typeface="Amiri" pitchFamily="2" charset="-78"/>
+                <a:cs typeface="Amiri" pitchFamily="2" charset="-78"/>
+              </a:rPr>
               <a:t>LANGUAGE BANK (2 min) — attach the object to the verb: نَظَّمْتُ الحَفْلَ → نَظَّمْتُهُ · سَاعَدْتُ الأَطْفَالَ → سَاعَدْتُهُمْ · كَتَبْتُ الرِّسَالَةَ → كَتَبْتُهَا. Two objects: أَعْطَانِي إِيَّاهَا (he gave it to me).</a:t>
             </a:r>
             <a:endParaRPr lang="en-US" dirty="0"/>
@@ -2576,7 +2612,11 @@
           <a:lstStyle/>
           <a:p>
             <a:r>
-              <a:rPr lang="en-US" dirty="0"/>
+              <a:rPr lang="ar-SA" dirty="0">
+                <a:latin typeface="Amiri" pitchFamily="2" charset="-78"/>
+                <a:ea typeface="Amiri" pitchFamily="2" charset="-78"/>
+                <a:cs typeface="Amiri" pitchFamily="2" charset="-78"/>
+              </a:rPr>
               <a:t>ROLE PLAY A (Core) — a phone enquiry.
 SET-UP IN THE BREAKOUT ROOM: A = examiner (reads the left column ONLY — the questions, in order), B = candidate (sees the task column; Core may use the help column), C = observer (ticks the feedback checklist). 1 minute preparation, about 3 minutes speaking, 1 minute feedback, then rotate.
 Task ! is the unexpected question: in the exam the candidate has not seen it — the examiner should read it without warning.
@@ -2668,7 +2708,11 @@
           <a:lstStyle/>
           <a:p>
             <a:r>
-              <a:rPr lang="en-US" dirty="0"/>
+              <a:rPr lang="ar-SA" dirty="0">
+                <a:latin typeface="Amiri" pitchFamily="2" charset="-78"/>
+                <a:ea typeface="Amiri" pitchFamily="2" charset="-78"/>
+                <a:cs typeface="Amiri" pitchFamily="2" charset="-78"/>
+              </a:rPr>
               <a:t>ROLE PLAY B (Core+) — a short interview.
 SET-UP IN THE BREAKOUT ROOM: A = examiner (reads the left column ONLY — the questions, in order), B = candidate (sees the task column; Core may use the help column), C = observer (ticks the feedback checklist). 1 minute preparation, about 3 minutes speaking, 1 minute feedback, then rotate.
 Task ! is the unexpected question: in the exam the candidate has not seen it — the examiner should read it without warning.
@@ -3156,6 +3200,7 @@
                   <a:srgbClr val="D4AF37"/>
                 </a:solidFill>
                 <a:latin typeface="Amiri" pitchFamily="2" charset="-78"/>
+                <a:ea typeface="Amiri" pitchFamily="2" charset="-78"/>
                 <a:cs typeface="Amiri" pitchFamily="2" charset="-78"/>
               </a:rPr>
               <a:t>م</a:t>
@@ -3362,6 +3407,7 @@
                   <a:srgbClr val="D4AF37"/>
                 </a:solidFill>
                 <a:latin typeface="Amiri" pitchFamily="2" charset="-78"/>
+                <a:ea typeface="Amiri" pitchFamily="2" charset="-78"/>
                 <a:cs typeface="Amiri" pitchFamily="2" charset="-78"/>
               </a:rPr>
               <a:t>وَرْشَةُ التَّحَدُّثِ — الطَّلَبَاتُ وَالمُقَابَلَاتُ</a:t>
@@ -3413,6 +3459,7 @@
                   <a:srgbClr val="C6D2E6"/>
                 </a:solidFill>
                 <a:latin typeface="Amiri" pitchFamily="2" charset="-78"/>
+                <a:ea typeface="Amiri" pitchFamily="2" charset="-78"/>
                 <a:cs typeface="Amiri" pitchFamily="2" charset="-78"/>
               </a:rPr>
               <a:t>عَمِلْتُ</a:t>
@@ -3439,6 +3486,7 @@
                   <a:srgbClr val="C6D2E6"/>
                 </a:solidFill>
                 <a:latin typeface="Amiri" pitchFamily="2" charset="-78"/>
+                <a:ea typeface="Amiri" pitchFamily="2" charset="-78"/>
                 <a:cs typeface="Amiri" pitchFamily="2" charset="-78"/>
               </a:rPr>
               <a:t>نَظَّمْتُ</a:t>
@@ -3465,6 +3513,7 @@
                   <a:srgbClr val="C6D2E6"/>
                 </a:solidFill>
                 <a:latin typeface="Amiri" pitchFamily="2" charset="-78"/>
+                <a:ea typeface="Amiri" pitchFamily="2" charset="-78"/>
                 <a:cs typeface="Amiri" pitchFamily="2" charset="-78"/>
               </a:rPr>
               <a:t>تَعَلَّمْتُ</a:t>
@@ -3491,6 +3540,7 @@
                   <a:srgbClr val="C6D2E6"/>
                 </a:solidFill>
                 <a:latin typeface="Amiri" pitchFamily="2" charset="-78"/>
+                <a:ea typeface="Amiri" pitchFamily="2" charset="-78"/>
                 <a:cs typeface="Amiri" pitchFamily="2" charset="-78"/>
               </a:rPr>
               <a:t>أُسَاعِدُهُمْ</a:t>
@@ -3517,6 +3567,7 @@
                   <a:srgbClr val="C6D2E6"/>
                 </a:solidFill>
                 <a:latin typeface="Amiri" pitchFamily="2" charset="-78"/>
+                <a:ea typeface="Amiri" pitchFamily="2" charset="-78"/>
                 <a:cs typeface="Amiri" pitchFamily="2" charset="-78"/>
               </a:rPr>
               <a:t>نَظَّمْتُهُ</a:t>
@@ -3543,6 +3594,7 @@
                   <a:srgbClr val="C6D2E6"/>
                 </a:solidFill>
                 <a:latin typeface="Amiri" pitchFamily="2" charset="-78"/>
+                <a:ea typeface="Amiri" pitchFamily="2" charset="-78"/>
                 <a:cs typeface="Amiri" pitchFamily="2" charset="-78"/>
               </a:rPr>
               <a:t>هَلْ يُمْكِنُنِي أَنْ أَسْأَلَ …؟</a:t>
@@ -3975,6 +4027,7 @@
                   <a:srgbClr val="D4AF37"/>
                 </a:solidFill>
                 <a:latin typeface="Amiri" pitchFamily="2" charset="-78"/>
+                <a:ea typeface="Amiri" pitchFamily="2" charset="-78"/>
                 <a:cs typeface="Amiri" pitchFamily="2" charset="-78"/>
               </a:rPr>
               <a:t>م</a:t>
@@ -4295,6 +4348,7 @@
                   <a:srgbClr val="8A6D1E"/>
                 </a:solidFill>
                 <a:latin typeface="Amiri" pitchFamily="2" charset="-78"/>
+                <a:ea typeface="Amiri" pitchFamily="2" charset="-78"/>
                 <a:cs typeface="Amiri" pitchFamily="2" charset="-78"/>
               </a:rPr>
               <a:t>مُرْشِدٌ فِي المَتْحَفِ</a:t>
@@ -4575,6 +4629,7 @@
                   <a:srgbClr val="1B3B6F"/>
                 </a:solidFill>
                 <a:latin typeface="Amiri" pitchFamily="2" charset="-78"/>
+                <a:ea typeface="Amiri" pitchFamily="2" charset="-78"/>
                 <a:cs typeface="Amiri" pitchFamily="2" charset="-78"/>
               </a:rPr>
               <a:t>يَسُرُّنِي أَنْ … أَنَا … وَأَدْرُسُ …</a:t>
@@ -4651,6 +4706,7 @@
                   <a:srgbClr val="1B3B6F"/>
                 </a:solidFill>
                 <a:latin typeface="Amiri" pitchFamily="2" charset="-78"/>
+                <a:ea typeface="Amiri" pitchFamily="2" charset="-78"/>
                 <a:cs typeface="Amiri" pitchFamily="2" charset="-78"/>
               </a:rPr>
               <a:t>حَدِّثْنَا عَنْ نَفْسِكَ.</a:t>
@@ -4754,6 +4810,7 @@
                   <a:srgbClr val="1B3B6F"/>
                 </a:solidFill>
                 <a:latin typeface="Amiri" pitchFamily="2" charset="-78"/>
+                <a:ea typeface="Amiri" pitchFamily="2" charset="-78"/>
                 <a:cs typeface="Amiri" pitchFamily="2" charset="-78"/>
               </a:rPr>
               <a:t>نَعَمْ، نَظَّمْتُ … وَقَدَّمْتُهُ …</a:t>
@@ -4830,6 +4887,7 @@
                   <a:srgbClr val="1B3B6F"/>
                 </a:solidFill>
                 <a:latin typeface="Amiri" pitchFamily="2" charset="-78"/>
+                <a:ea typeface="Amiri" pitchFamily="2" charset="-78"/>
                 <a:cs typeface="Amiri" pitchFamily="2" charset="-78"/>
               </a:rPr>
               <a:t>هَلْ لَدَيْكَ خِبْرَةٌ فِي التَّحَدُّثِ أَمَامَ الجُمْهُورِ؟</a:t>
@@ -4933,6 +4991,7 @@
                   <a:srgbClr val="1B3B6F"/>
                 </a:solidFill>
                 <a:latin typeface="Amiri" pitchFamily="2" charset="-78"/>
+                <a:ea typeface="Amiri" pitchFamily="2" charset="-78"/>
                 <a:cs typeface="Amiri" pitchFamily="2" charset="-78"/>
               </a:rPr>
               <a:t>أَبْدَأُ بِسُؤَالٍ … ثُمَّ أَطْلُبُ مِنْهُمْ أَنْ …</a:t>
@@ -5009,6 +5068,7 @@
                   <a:srgbClr val="1B3B6F"/>
                 </a:solidFill>
                 <a:latin typeface="Amiri" pitchFamily="2" charset="-78"/>
+                <a:ea typeface="Amiri" pitchFamily="2" charset="-78"/>
                 <a:cs typeface="Amiri" pitchFamily="2" charset="-78"/>
               </a:rPr>
               <a:t>كَيْفَ تَشْرَحُ قِطْعَةً أَثَرِيَّةً لِلْأَطْفَالِ؟</a:t>
@@ -5112,6 +5172,7 @@
                   <a:srgbClr val="1B3B6F"/>
                 </a:solidFill>
                 <a:latin typeface="Amiri" pitchFamily="2" charset="-78"/>
+                <a:ea typeface="Amiri" pitchFamily="2" charset="-78"/>
                 <a:cs typeface="Amiri" pitchFamily="2" charset="-78"/>
               </a:rPr>
               <a:t>نَعَمْ يُنَاسِبُنِي. هَلْ يُمْكِنُنِي أَنْ أَسْأَلَ …؟</a:t>
@@ -5188,6 +5249,7 @@
                   <a:srgbClr val="1B3B6F"/>
                 </a:solidFill>
                 <a:latin typeface="Amiri" pitchFamily="2" charset="-78"/>
+                <a:ea typeface="Amiri" pitchFamily="2" charset="-78"/>
                 <a:cs typeface="Amiri" pitchFamily="2" charset="-78"/>
               </a:rPr>
               <a:t>العَمَلُ يَوْمَ السَّبْتِ. هَلْ يُنَاسِبُكَ؟</a:t>
@@ -5291,6 +5353,7 @@
                   <a:srgbClr val="1B3B6F"/>
                 </a:solidFill>
                 <a:latin typeface="Amiri" pitchFamily="2" charset="-78"/>
+                <a:ea typeface="Amiri" pitchFamily="2" charset="-78"/>
                 <a:cs typeface="Amiri" pitchFamily="2" charset="-78"/>
               </a:rPr>
               <a:t>إِذَا سَأَلَنِي …، فَسَأَعْتَرِفُ …</a:t>
@@ -5367,6 +5430,7 @@
                   <a:srgbClr val="1B3B6F"/>
                 </a:solidFill>
                 <a:latin typeface="Amiri" pitchFamily="2" charset="-78"/>
+                <a:ea typeface="Amiri" pitchFamily="2" charset="-78"/>
                 <a:cs typeface="Amiri" pitchFamily="2" charset="-78"/>
               </a:rPr>
               <a:t>مَاذَا تَفْعَلُ إِذَا سَأَلَكَ زَائِرٌ سُؤَالًا لَا تَعْرِفُ جَوَابَهُ؟</a:t>
@@ -5576,6 +5640,7 @@
                   <a:srgbClr val="D4AF37"/>
                 </a:solidFill>
                 <a:latin typeface="Amiri" pitchFamily="2" charset="-78"/>
+                <a:ea typeface="Amiri" pitchFamily="2" charset="-78"/>
                 <a:cs typeface="Amiri" pitchFamily="2" charset="-78"/>
               </a:rPr>
               <a:t>م</a:t>
@@ -5896,6 +5961,7 @@
                   <a:srgbClr val="8A6D1E"/>
                 </a:solidFill>
                 <a:latin typeface="Amiri" pitchFamily="2" charset="-78"/>
+                <a:ea typeface="Amiri" pitchFamily="2" charset="-78"/>
                 <a:cs typeface="Amiri" pitchFamily="2" charset="-78"/>
               </a:rPr>
               <a:t>سَفِيرُ الشَّبَابِ</a:t>
@@ -6176,6 +6242,7 @@
                   <a:srgbClr val="1B3B6F"/>
                 </a:solidFill>
                 <a:latin typeface="Amiri" pitchFamily="2" charset="-78"/>
+                <a:ea typeface="Amiri" pitchFamily="2" charset="-78"/>
                 <a:cs typeface="Amiri" pitchFamily="2" charset="-78"/>
               </a:rPr>
               <a:t>لِأَنَّنِي … وَالدَّلِيلُ أَنَّنِي …</a:t>
@@ -6252,6 +6319,7 @@
                   <a:srgbClr val="1B3B6F"/>
                 </a:solidFill>
                 <a:latin typeface="Amiri" pitchFamily="2" charset="-78"/>
+                <a:ea typeface="Amiri" pitchFamily="2" charset="-78"/>
                 <a:cs typeface="Amiri" pitchFamily="2" charset="-78"/>
               </a:rPr>
               <a:t>لِمَاذَا يَجِبُ أَنْ نَخْتَارَكَ أَنْتَ؟</a:t>
@@ -6355,6 +6423,7 @@
                   <a:srgbClr val="1B3B6F"/>
                 </a:solidFill>
                 <a:latin typeface="Amiri" pitchFamily="2" charset="-78"/>
+                <a:ea typeface="Amiri" pitchFamily="2" charset="-78"/>
                 <a:cs typeface="Amiri" pitchFamily="2" charset="-78"/>
               </a:rPr>
               <a:t>فِي البِدَايَةِ … لٰكِنِّي تَعَلَّمْتُ أَنَّ …</a:t>
@@ -6431,6 +6500,7 @@
                   <a:srgbClr val="1B3B6F"/>
                 </a:solidFill>
                 <a:latin typeface="Amiri" pitchFamily="2" charset="-78"/>
+                <a:ea typeface="Amiri" pitchFamily="2" charset="-78"/>
                 <a:cs typeface="Amiri" pitchFamily="2" charset="-78"/>
               </a:rPr>
               <a:t>حَدِّثْنَا عَنْ فَشَلٍ تَعَلَّمْتَ مِنْهُ.</a:t>
@@ -6534,6 +6604,7 @@
                   <a:srgbClr val="1B3B6F"/>
                 </a:solidFill>
                 <a:latin typeface="Amiri" pitchFamily="2" charset="-78"/>
+                <a:ea typeface="Amiri" pitchFamily="2" charset="-78"/>
                 <a:cs typeface="Amiri" pitchFamily="2" charset="-78"/>
               </a:rPr>
               <a:t>صَحِيحٌ أَنَّ … غَيْرَ أَنِّي …</a:t>
@@ -6610,6 +6681,7 @@
                   <a:srgbClr val="1B3B6F"/>
                 </a:solidFill>
                 <a:latin typeface="Amiri" pitchFamily="2" charset="-78"/>
+                <a:ea typeface="Amiri" pitchFamily="2" charset="-78"/>
                 <a:cs typeface="Amiri" pitchFamily="2" charset="-78"/>
               </a:rPr>
               <a:t>هٰذَا الدَّوْرُ يَتَطَلَّبُ وَقْتًا كَثِيرًا. أَلَنْ يُؤَثِّرَ فِي دِرَاسَتِكَ؟</a:t>
@@ -6713,6 +6785,7 @@
                   <a:srgbClr val="1B3B6F"/>
                 </a:solidFill>
                 <a:latin typeface="Amiri" pitchFamily="2" charset="-78"/>
+                <a:ea typeface="Amiri" pitchFamily="2" charset="-78"/>
                 <a:cs typeface="Amiri" pitchFamily="2" charset="-78"/>
               </a:rPr>
               <a:t>نَعَمْ، أَوَدُّ أَنْ أَعْرِفَ … وَهَلْ …؟</a:t>
@@ -6789,6 +6862,7 @@
                   <a:srgbClr val="1B3B6F"/>
                 </a:solidFill>
                 <a:latin typeface="Amiri" pitchFamily="2" charset="-78"/>
+                <a:ea typeface="Amiri" pitchFamily="2" charset="-78"/>
                 <a:cs typeface="Amiri" pitchFamily="2" charset="-78"/>
               </a:rPr>
               <a:t>هَلْ لَدَيْكَ سُؤَالٌ لَنَا؟</a:t>
@@ -6892,6 +6966,7 @@
                   <a:srgbClr val="1B3B6F"/>
                 </a:solidFill>
                 <a:latin typeface="Amiri" pitchFamily="2" charset="-78"/>
+                <a:ea typeface="Amiri" pitchFamily="2" charset="-78"/>
                 <a:cs typeface="Amiri" pitchFamily="2" charset="-78"/>
               </a:rPr>
               <a:t>لَوْ لَمْ أُقْبَلْ، لَطَلَبْتُ …</a:t>
@@ -6968,6 +7043,7 @@
                   <a:srgbClr val="1B3B6F"/>
                 </a:solidFill>
                 <a:latin typeface="Amiri" pitchFamily="2" charset="-78"/>
+                <a:ea typeface="Amiri" pitchFamily="2" charset="-78"/>
                 <a:cs typeface="Amiri" pitchFamily="2" charset="-78"/>
               </a:rPr>
               <a:t>لَوْ لَمْ تُقْبَلْ، مَاذَا سَتَفْعَلُ؟</a:t>
@@ -7177,6 +7253,7 @@
                   <a:srgbClr val="D4AF37"/>
                 </a:solidFill>
                 <a:latin typeface="Amiri" pitchFamily="2" charset="-78"/>
+                <a:ea typeface="Amiri" pitchFamily="2" charset="-78"/>
                 <a:cs typeface="Amiri" pitchFamily="2" charset="-78"/>
               </a:rPr>
               <a:t>م</a:t>
@@ -7497,6 +7574,7 @@
                   <a:srgbClr val="8A6D1E"/>
                 </a:solidFill>
                 <a:latin typeface="Amiri" pitchFamily="2" charset="-78"/>
+                <a:ea typeface="Amiri" pitchFamily="2" charset="-78"/>
                 <a:cs typeface="Amiri" pitchFamily="2" charset="-78"/>
               </a:rPr>
               <a:t>وَرَقَةُ المُلَاحِظِ</a:t>
@@ -8967,6 +9045,7 @@
                   <a:srgbClr val="D4AF37"/>
                 </a:solidFill>
                 <a:latin typeface="Amiri" pitchFamily="2" charset="-78"/>
+                <a:ea typeface="Amiri" pitchFamily="2" charset="-78"/>
                 <a:cs typeface="Amiri" pitchFamily="2" charset="-78"/>
               </a:rPr>
               <a:t>م</a:t>
@@ -9287,6 +9366,7 @@
                   <a:srgbClr val="8A6D1E"/>
                 </a:solidFill>
                 <a:latin typeface="Amiri" pitchFamily="2" charset="-78"/>
+                <a:ea typeface="Amiri" pitchFamily="2" charset="-78"/>
                 <a:cs typeface="Amiri" pitchFamily="2" charset="-78"/>
               </a:rPr>
               <a:t>نَمُوذَجُ الإِجَابَةِ</a:t>
@@ -9529,6 +9609,7 @@
                   <a:srgbClr val="1B3B6F"/>
                 </a:solidFill>
                 <a:latin typeface="Amiri" pitchFamily="2" charset="-78"/>
+                <a:ea typeface="Amiri" pitchFamily="2" charset="-78"/>
                 <a:cs typeface="Amiri" pitchFamily="2" charset="-78"/>
               </a:rPr>
               <a:t>صَبَاحَ النُّورِ، أَتَّصِلُ بِخُصُوصِ إِعْلَانِ الوَظِيفَةِ.</a:t>
@@ -9605,6 +9686,7 @@
                   <a:srgbClr val="1B3B6F"/>
                 </a:solidFill>
                 <a:latin typeface="Amiri" pitchFamily="2" charset="-78"/>
+                <a:ea typeface="Amiri" pitchFamily="2" charset="-78"/>
                 <a:cs typeface="Amiri" pitchFamily="2" charset="-78"/>
               </a:rPr>
               <a:t>فُنْدُقُ النَّخِيلِ، صَبَاحَ الخَيْرِ.</a:t>
@@ -9708,6 +9790,7 @@
                   <a:srgbClr val="1B3B6F"/>
                 </a:solidFill>
                 <a:latin typeface="Amiri" pitchFamily="2" charset="-78"/>
+                <a:ea typeface="Amiri" pitchFamily="2" charset="-78"/>
                 <a:cs typeface="Amiri" pitchFamily="2" charset="-78"/>
               </a:rPr>
               <a:t>وَظِيفَةُ مُسَاعِدٍ فِي المَطْعَمِ.</a:t>
@@ -9784,6 +9867,7 @@
                   <a:srgbClr val="1B3B6F"/>
                 </a:solidFill>
                 <a:latin typeface="Amiri" pitchFamily="2" charset="-78"/>
+                <a:ea typeface="Amiri" pitchFamily="2" charset="-78"/>
                 <a:cs typeface="Amiri" pitchFamily="2" charset="-78"/>
               </a:rPr>
               <a:t>أَيُّ وَظِيفَةٍ؟</a:t>
@@ -9887,6 +9971,7 @@
                   <a:srgbClr val="1B3B6F"/>
                 </a:solidFill>
                 <a:latin typeface="Amiri" pitchFamily="2" charset="-78"/>
+                <a:ea typeface="Amiri" pitchFamily="2" charset="-78"/>
                 <a:cs typeface="Amiri" pitchFamily="2" charset="-78"/>
               </a:rPr>
               <a:t>عُمْرِي سَبْعَ عَشْرَةَ سَنَةً.</a:t>
@@ -9963,6 +10048,7 @@
                   <a:srgbClr val="1B3B6F"/>
                 </a:solidFill>
                 <a:latin typeface="Amiri" pitchFamily="2" charset="-78"/>
+                <a:ea typeface="Amiri" pitchFamily="2" charset="-78"/>
                 <a:cs typeface="Amiri" pitchFamily="2" charset="-78"/>
               </a:rPr>
               <a:t>كَمْ عُمْرُكَ؟</a:t>
@@ -10066,6 +10152,7 @@
                   <a:srgbClr val="1B3B6F"/>
                 </a:solidFill>
                 <a:latin typeface="Amiri" pitchFamily="2" charset="-78"/>
+                <a:ea typeface="Amiri" pitchFamily="2" charset="-78"/>
                 <a:cs typeface="Amiri" pitchFamily="2" charset="-78"/>
               </a:rPr>
               <a:t>نَعَمْ، سَأُرْسِلُهَا بِالبَرِيدِ الإِلِكْتْرُونِيِّ اليَوْمَ.</a:t>
@@ -10142,6 +10229,7 @@
                   <a:srgbClr val="1B3B6F"/>
                 </a:solidFill>
                 <a:latin typeface="Amiri" pitchFamily="2" charset="-78"/>
+                <a:ea typeface="Amiri" pitchFamily="2" charset="-78"/>
                 <a:cs typeface="Amiri" pitchFamily="2" charset="-78"/>
               </a:rPr>
               <a:t>هَلْ عِنْدَكَ سِيرَةٌ ذَاتِيَّةٌ؟</a:t>
@@ -10245,6 +10333,7 @@
                   <a:srgbClr val="1B3B6F"/>
                 </a:solidFill>
                 <a:latin typeface="Amiri" pitchFamily="2" charset="-78"/>
+                <a:ea typeface="Amiri" pitchFamily="2" charset="-78"/>
                 <a:cs typeface="Amiri" pitchFamily="2" charset="-78"/>
               </a:rPr>
               <a:t>أَسْتَطِيعُ أَنْ آتِيَ يَوْمَ الخَمِيسِ بَعْدَ الظُّهْرِ.</a:t>
@@ -10321,6 +10410,7 @@
                   <a:srgbClr val="1B3B6F"/>
                 </a:solidFill>
                 <a:latin typeface="Amiri" pitchFamily="2" charset="-78"/>
+                <a:ea typeface="Amiri" pitchFamily="2" charset="-78"/>
                 <a:cs typeface="Amiri" pitchFamily="2" charset="-78"/>
               </a:rPr>
               <a:t>مَتَى تَسْتَطِيعُ أَنْ تَأْتِيَ لِلْمُقَابَلَةِ؟</a:t>
@@ -10530,6 +10620,7 @@
                   <a:srgbClr val="D4AF37"/>
                 </a:solidFill>
                 <a:latin typeface="Amiri" pitchFamily="2" charset="-78"/>
+                <a:ea typeface="Amiri" pitchFamily="2" charset="-78"/>
                 <a:cs typeface="Amiri" pitchFamily="2" charset="-78"/>
               </a:rPr>
               <a:t>م</a:t>
@@ -10850,6 +10941,7 @@
                   <a:srgbClr val="8A6D1E"/>
                 </a:solidFill>
                 <a:latin typeface="Amiri" pitchFamily="2" charset="-78"/>
+                <a:ea typeface="Amiri" pitchFamily="2" charset="-78"/>
                 <a:cs typeface="Amiri" pitchFamily="2" charset="-78"/>
               </a:rPr>
               <a:t>نَمُوذَجُ الإِجَابَةِ</a:t>
@@ -11092,6 +11184,7 @@
                   <a:srgbClr val="1B3B6F"/>
                 </a:solidFill>
                 <a:latin typeface="Amiri" pitchFamily="2" charset="-78"/>
+                <a:ea typeface="Amiri" pitchFamily="2" charset="-78"/>
                 <a:cs typeface="Amiri" pitchFamily="2" charset="-78"/>
               </a:rPr>
               <a:t>لِأَنِّي أُحِبُّ التَّعَامُلَ مَعَ النَّاسِ، وَأُرِيدُ أَنْ أَكْسِبَ خِبْرَةً.</a:t>
@@ -11168,6 +11261,7 @@
                   <a:srgbClr val="1B3B6F"/>
                 </a:solidFill>
                 <a:latin typeface="Amiri" pitchFamily="2" charset="-78"/>
+                <a:ea typeface="Amiri" pitchFamily="2" charset="-78"/>
                 <a:cs typeface="Amiri" pitchFamily="2" charset="-78"/>
               </a:rPr>
               <a:t>تَفَضَّلْ بِالجُلُوسِ. لِمَاذَا تُرِيدُ هٰذِهِ الوَظِيفَةَ؟</a:t>
@@ -11271,6 +11365,7 @@
                   <a:srgbClr val="1B3B6F"/>
                 </a:solidFill>
                 <a:latin typeface="Amiri" pitchFamily="2" charset="-78"/>
+                <a:ea typeface="Amiri" pitchFamily="2" charset="-78"/>
                 <a:cs typeface="Amiri" pitchFamily="2" charset="-78"/>
               </a:rPr>
               <a:t>نَعَمْ، عَمِلْتُ فِي مَخْبَزٍ فِي الصَّيْفِ المَاضِي.</a:t>
@@ -11347,6 +11442,7 @@
                   <a:srgbClr val="1B3B6F"/>
                 </a:solidFill>
                 <a:latin typeface="Amiri" pitchFamily="2" charset="-78"/>
+                <a:ea typeface="Amiri" pitchFamily="2" charset="-78"/>
                 <a:cs typeface="Amiri" pitchFamily="2" charset="-78"/>
               </a:rPr>
               <a:t>هَلْ عَمِلْتَ مِنْ قَبْلُ؟</a:t>
@@ -11450,6 +11546,7 @@
                   <a:srgbClr val="1B3B6F"/>
                 </a:solidFill>
                 <a:latin typeface="Amiri" pitchFamily="2" charset="-78"/>
+                <a:ea typeface="Amiri" pitchFamily="2" charset="-78"/>
                 <a:cs typeface="Amiri" pitchFamily="2" charset="-78"/>
               </a:rPr>
               <a:t>كُنْتُ أَبِيعُ الخُبْزَ وَأُرَتِّبُهُ عَلَى الرُّفُوفِ، وَأُسَاعِدُ الزَّبَائِنَ وَأُجِيبُ عَنْ أَسْئِلَتِهِمْ.</a:t>
@@ -11526,6 +11623,7 @@
                   <a:srgbClr val="1B3B6F"/>
                 </a:solidFill>
                 <a:latin typeface="Amiri" pitchFamily="2" charset="-78"/>
+                <a:ea typeface="Amiri" pitchFamily="2" charset="-78"/>
                 <a:cs typeface="Amiri" pitchFamily="2" charset="-78"/>
               </a:rPr>
               <a:t>وَمَاذَا كُنْتَ تَفْعَلُ هُنَاكَ؟</a:t>
@@ -11629,6 +11727,7 @@
                   <a:srgbClr val="1B3B6F"/>
                 </a:solidFill>
                 <a:latin typeface="Amiri" pitchFamily="2" charset="-78"/>
+                <a:ea typeface="Amiri" pitchFamily="2" charset="-78"/>
                 <a:cs typeface="Amiri" pitchFamily="2" charset="-78"/>
               </a:rPr>
               <a:t>نَعَمْ، هَلْ يُمْكِنُنِي أَنْ أَسْأَلَ عَنْ سَاعَاتِ العَمَلِ؟</a:t>
@@ -11705,6 +11804,7 @@
                   <a:srgbClr val="1B3B6F"/>
                 </a:solidFill>
                 <a:latin typeface="Amiri" pitchFamily="2" charset="-78"/>
+                <a:ea typeface="Amiri" pitchFamily="2" charset="-78"/>
                 <a:cs typeface="Amiri" pitchFamily="2" charset="-78"/>
               </a:rPr>
               <a:t>هَلْ عِنْدَكَ أَسْئِلَةٌ؟</a:t>
@@ -11808,6 +11908,7 @@
                   <a:srgbClr val="1B3B6F"/>
                 </a:solidFill>
                 <a:latin typeface="Amiri" pitchFamily="2" charset="-78"/>
+                <a:ea typeface="Amiri" pitchFamily="2" charset="-78"/>
                 <a:cs typeface="Amiri" pitchFamily="2" charset="-78"/>
               </a:rPr>
               <a:t>أَنَا صَبُورٌ؛ فَمَثَلًا كَانَ بَعْضُ الزَّبَائِنِ غَاضِبِينَ، فَاسْتَمَعْتُ إِلَيْهِمْ بِهُدُوءٍ.</a:t>
@@ -11884,6 +11985,7 @@
                   <a:srgbClr val="1B3B6F"/>
                 </a:solidFill>
                 <a:latin typeface="Amiri" pitchFamily="2" charset="-78"/>
+                <a:ea typeface="Amiri" pitchFamily="2" charset="-78"/>
                 <a:cs typeface="Amiri" pitchFamily="2" charset="-78"/>
               </a:rPr>
               <a:t>مَا أَكْبَرُ نُقْطَةِ قُوَّةٍ عِنْدَكَ؟</a:t>
@@ -12093,6 +12195,7 @@
                   <a:srgbClr val="D4AF37"/>
                 </a:solidFill>
                 <a:latin typeface="Amiri" pitchFamily="2" charset="-78"/>
+                <a:ea typeface="Amiri" pitchFamily="2" charset="-78"/>
                 <a:cs typeface="Amiri" pitchFamily="2" charset="-78"/>
               </a:rPr>
               <a:t>م</a:t>
@@ -12413,6 +12516,7 @@
                   <a:srgbClr val="8A6D1E"/>
                 </a:solidFill>
                 <a:latin typeface="Amiri" pitchFamily="2" charset="-78"/>
+                <a:ea typeface="Amiri" pitchFamily="2" charset="-78"/>
                 <a:cs typeface="Amiri" pitchFamily="2" charset="-78"/>
               </a:rPr>
               <a:t>نَمُوذَجُ الإِجَابَةِ</a:t>
@@ -12655,6 +12759,7 @@
                   <a:srgbClr val="1B3B6F"/>
                 </a:solidFill>
                 <a:latin typeface="Amiri" pitchFamily="2" charset="-78"/>
+                <a:ea typeface="Amiri" pitchFamily="2" charset="-78"/>
                 <a:cs typeface="Amiri" pitchFamily="2" charset="-78"/>
               </a:rPr>
               <a:t>يَسُرُّنِي أَنْ أَكُونَ هُنَا. أَنَا طَالِبٌ فِي الصَّفِّ الثَّانِي عَشَرَ، وَأَدْرُسُ التَّارِيخَ وَالعَرَبِيَّةَ.</a:t>
@@ -12731,6 +12836,7 @@
                   <a:srgbClr val="1B3B6F"/>
                 </a:solidFill>
                 <a:latin typeface="Amiri" pitchFamily="2" charset="-78"/>
+                <a:ea typeface="Amiri" pitchFamily="2" charset="-78"/>
                 <a:cs typeface="Amiri" pitchFamily="2" charset="-78"/>
               </a:rPr>
               <a:t>حَدِّثْنَا عَنْ نَفْسِكَ.</a:t>
@@ -12834,6 +12940,7 @@
                   <a:srgbClr val="1B3B6F"/>
                 </a:solidFill>
                 <a:latin typeface="Amiri" pitchFamily="2" charset="-78"/>
+                <a:ea typeface="Amiri" pitchFamily="2" charset="-78"/>
                 <a:cs typeface="Amiri" pitchFamily="2" charset="-78"/>
               </a:rPr>
               <a:t>نَعَمْ، نَظَّمْتُ مَعْرِضًا عَنْ تَارِيخِ الأَنْدَلُسِ فِي مَدْرَسَتِي، وَقَدَّمْتُهُ لِأَوْلِيَاءِ الأُمُورِ، فَأَعْجَبَهُمْ كَثِيرًا.</a:t>
@@ -12910,6 +13017,7 @@
                   <a:srgbClr val="1B3B6F"/>
                 </a:solidFill>
                 <a:latin typeface="Amiri" pitchFamily="2" charset="-78"/>
+                <a:ea typeface="Amiri" pitchFamily="2" charset="-78"/>
                 <a:cs typeface="Amiri" pitchFamily="2" charset="-78"/>
               </a:rPr>
               <a:t>هَلْ لَدَيْكَ خِبْرَةٌ فِي التَّحَدُّثِ أَمَامَ الجُمْهُورِ؟</a:t>
@@ -13013,6 +13121,7 @@
                   <a:srgbClr val="1B3B6F"/>
                 </a:solidFill>
                 <a:latin typeface="Amiri" pitchFamily="2" charset="-78"/>
+                <a:ea typeface="Amiri" pitchFamily="2" charset="-78"/>
                 <a:cs typeface="Amiri" pitchFamily="2" charset="-78"/>
               </a:rPr>
               <a:t>أَبْدَأُ بِسُؤَالٍ يُثِيرُ فُضُولَهُمْ، ثُمَّ أَحْكِي لَهُمْ قِصَّةً قَصِيرَةً عَنْهَا، وَأَطْلُبُ مِنْهُمْ أَنْ يَرْسُمُوهَا.</a:t>
@@ -13089,6 +13198,7 @@
                   <a:srgbClr val="1B3B6F"/>
                 </a:solidFill>
                 <a:latin typeface="Amiri" pitchFamily="2" charset="-78"/>
+                <a:ea typeface="Amiri" pitchFamily="2" charset="-78"/>
                 <a:cs typeface="Amiri" pitchFamily="2" charset="-78"/>
               </a:rPr>
               <a:t>كَيْفَ تَشْرَحُ قِطْعَةً أَثَرِيَّةً لِلْأَطْفَالِ؟</a:t>
@@ -13192,6 +13302,7 @@
                   <a:srgbClr val="1B3B6F"/>
                 </a:solidFill>
                 <a:latin typeface="Amiri" pitchFamily="2" charset="-78"/>
+                <a:ea typeface="Amiri" pitchFamily="2" charset="-78"/>
                 <a:cs typeface="Amiri" pitchFamily="2" charset="-78"/>
               </a:rPr>
               <a:t>نَعَمْ، يُنَاسِبُنِي تَمَامًا. هَلْ يُمْكِنُنِي أَنْ أَسْأَلَ: هَلْ تُقَدِّمُونَ تَدْرِيبًا لِلْمُرْشِدِينَ الجُدُدِ؟</a:t>
@@ -13268,6 +13379,7 @@
                   <a:srgbClr val="1B3B6F"/>
                 </a:solidFill>
                 <a:latin typeface="Amiri" pitchFamily="2" charset="-78"/>
+                <a:ea typeface="Amiri" pitchFamily="2" charset="-78"/>
                 <a:cs typeface="Amiri" pitchFamily="2" charset="-78"/>
               </a:rPr>
               <a:t>العَمَلُ يَوْمَ السَّبْتِ. هَلْ يُنَاسِبُكَ؟</a:t>
@@ -13371,6 +13483,7 @@
                   <a:srgbClr val="1B3B6F"/>
                 </a:solidFill>
                 <a:latin typeface="Amiri" pitchFamily="2" charset="-78"/>
+                <a:ea typeface="Amiri" pitchFamily="2" charset="-78"/>
                 <a:cs typeface="Amiri" pitchFamily="2" charset="-78"/>
               </a:rPr>
               <a:t>إِذَا سَأَلَنِي سُؤَالًا لَا أَعْرِفُ جَوَابَهُ، فَسَأَعْتَرِفُ بِذٰلِكَ بِأَدَبٍ، وَسَأَبْحَثُ عَنِ الجَوَابِ، ثُمَّ أُرْسِلُهُ إِلَيْهِ.</a:t>
@@ -13447,6 +13560,7 @@
                   <a:srgbClr val="1B3B6F"/>
                 </a:solidFill>
                 <a:latin typeface="Amiri" pitchFamily="2" charset="-78"/>
+                <a:ea typeface="Amiri" pitchFamily="2" charset="-78"/>
                 <a:cs typeface="Amiri" pitchFamily="2" charset="-78"/>
               </a:rPr>
               <a:t>مَاذَا تَفْعَلُ إِذَا سَأَلَكَ زَائِرٌ سُؤَالًا لَا تَعْرِفُ جَوَابَهُ؟</a:t>
@@ -13656,6 +13770,7 @@
                   <a:srgbClr val="D4AF37"/>
                 </a:solidFill>
                 <a:latin typeface="Amiri" pitchFamily="2" charset="-78"/>
+                <a:ea typeface="Amiri" pitchFamily="2" charset="-78"/>
                 <a:cs typeface="Amiri" pitchFamily="2" charset="-78"/>
               </a:rPr>
               <a:t>م</a:t>
@@ -13976,6 +14091,7 @@
                   <a:srgbClr val="8A6D1E"/>
                 </a:solidFill>
                 <a:latin typeface="Amiri" pitchFamily="2" charset="-78"/>
+                <a:ea typeface="Amiri" pitchFamily="2" charset="-78"/>
                 <a:cs typeface="Amiri" pitchFamily="2" charset="-78"/>
               </a:rPr>
               <a:t>نَمُوذَجُ الإِجَابَةِ</a:t>
@@ -14218,6 +14334,7 @@
                   <a:srgbClr val="1B3B6F"/>
                 </a:solidFill>
                 <a:latin typeface="Amiri" pitchFamily="2" charset="-78"/>
+                <a:ea typeface="Amiri" pitchFamily="2" charset="-78"/>
                 <a:cs typeface="Amiri" pitchFamily="2" charset="-78"/>
               </a:rPr>
               <a:t>لِأَنَّنِي أَجْمَعُ بَيْنَ الحَمَاسِ وَالخِبْرَةِ؛ وَالدَّلِيلُ أَنَّنِي أَسَّسْتُ نَادِيًا لِلتَّطَوُّعِ فِي مَدْرَسَتِي، وَطَوَّرْتُهُ حَتَّى أَصْبَحَ يَضُمُّ خَمْسِينَ عُضْوًا.</a:t>
@@ -14294,6 +14411,7 @@
                   <a:srgbClr val="1B3B6F"/>
                 </a:solidFill>
                 <a:latin typeface="Amiri" pitchFamily="2" charset="-78"/>
+                <a:ea typeface="Amiri" pitchFamily="2" charset="-78"/>
                 <a:cs typeface="Amiri" pitchFamily="2" charset="-78"/>
               </a:rPr>
               <a:t>لِمَاذَا يَجِبُ أَنْ نَخْتَارَكَ أَنْتَ؟</a:t>
@@ -14397,6 +14515,7 @@
                   <a:srgbClr val="1B3B6F"/>
                 </a:solidFill>
                 <a:latin typeface="Amiri" pitchFamily="2" charset="-78"/>
+                <a:ea typeface="Amiri" pitchFamily="2" charset="-78"/>
                 <a:cs typeface="Amiri" pitchFamily="2" charset="-78"/>
               </a:rPr>
               <a:t>فِي البِدَايَةِ نَظَّمْتُ حَمْلَةً لِجَمْعِ التَّبَرُّعَاتِ دُونَ تَخْطِيطٍ كَافٍ، فَلَمْ يَأْتِ أَحَدٌ، لٰكِنِّي تَعَلَّمْتُ أَنَّ الإِعْلَانَ المُبَكِّرَ نِصْفُ النَّجَاحِ.</a:t>
@@ -14473,6 +14592,7 @@
                   <a:srgbClr val="1B3B6F"/>
                 </a:solidFill>
                 <a:latin typeface="Amiri" pitchFamily="2" charset="-78"/>
+                <a:ea typeface="Amiri" pitchFamily="2" charset="-78"/>
                 <a:cs typeface="Amiri" pitchFamily="2" charset="-78"/>
               </a:rPr>
               <a:t>حَدِّثْنَا عَنْ فَشَلٍ تَعَلَّمْتَ مِنْهُ.</a:t>
@@ -14576,6 +14696,7 @@
                   <a:srgbClr val="1B3B6F"/>
                 </a:solidFill>
                 <a:latin typeface="Amiri" pitchFamily="2" charset="-78"/>
+                <a:ea typeface="Amiri" pitchFamily="2" charset="-78"/>
                 <a:cs typeface="Amiri" pitchFamily="2" charset="-78"/>
               </a:rPr>
               <a:t>صَحِيحٌ أَنَّهُ يَتَطَلَّبُ وَقْتًا، غَيْرَ أَنِّي تَعَوَّدْتُ أَنْ أُوَازِنَ بَيْنَ الدِّرَاسَةِ وَالنَّشَاطَاتِ، وَنَتَائِجِي هٰذَا العَامَ أَفْضَلُ مِنَ العَامِ المَاضِي.</a:t>
@@ -14655,6 +14776,7 @@
                   <a:srgbClr val="1B3B6F"/>
                 </a:solidFill>
                 <a:latin typeface="Amiri" pitchFamily="2" charset="-78"/>
+                <a:ea typeface="Amiri" pitchFamily="2" charset="-78"/>
                 <a:cs typeface="Amiri" pitchFamily="2" charset="-78"/>
               </a:rPr>
               <a:t>هٰذَا الدَّوْرُ يَتَطَلَّبُ وَقْتًا كَثِيرًا. أَلَنْ يُؤَثِّرَ فِي دِرَاسَتِكَ؟</a:t>
@@ -14758,6 +14880,7 @@
                   <a:srgbClr val="1B3B6F"/>
                 </a:solidFill>
                 <a:latin typeface="Amiri" pitchFamily="2" charset="-78"/>
+                <a:ea typeface="Amiri" pitchFamily="2" charset="-78"/>
                 <a:cs typeface="Amiri" pitchFamily="2" charset="-78"/>
               </a:rPr>
               <a:t>نَعَمْ، أَوَدُّ أَنْ أَعْرِفَ مَا أَهَمُّ التَّحَدِّيَاتِ الَّتِي يُوَاجِهُهَا السُّفَرَاءُ، وَهَلْ سَيَكُونُ هُنَاكَ مُرْشِدٌ يُتَابِعُ عَمَلَنَا؟</a:t>
@@ -14834,6 +14957,7 @@
                   <a:srgbClr val="1B3B6F"/>
                 </a:solidFill>
                 <a:latin typeface="Amiri" pitchFamily="2" charset="-78"/>
+                <a:ea typeface="Amiri" pitchFamily="2" charset="-78"/>
                 <a:cs typeface="Amiri" pitchFamily="2" charset="-78"/>
               </a:rPr>
               <a:t>هَلْ لَدَيْكَ سُؤَالٌ لَنَا؟</a:t>
@@ -14937,6 +15061,7 @@
                   <a:srgbClr val="1B3B6F"/>
                 </a:solidFill>
                 <a:latin typeface="Amiri" pitchFamily="2" charset="-78"/>
+                <a:ea typeface="Amiri" pitchFamily="2" charset="-78"/>
                 <a:cs typeface="Amiri" pitchFamily="2" charset="-78"/>
               </a:rPr>
               <a:t>لَوْ لَمْ أُقْبَلْ، لَطَلَبْتُ مِنْكُمْ مُلَاحَظَاتٍ عَلَى أَدَائِي، وَلَتَقَدَّمْتُ مَرَّةً أُخْرَى فِي العَامِ القَادِمِ بِخِبْرَةٍ أَكْبَرَ.</a:t>
@@ -15013,6 +15138,7 @@
                   <a:srgbClr val="1B3B6F"/>
                 </a:solidFill>
                 <a:latin typeface="Amiri" pitchFamily="2" charset="-78"/>
+                <a:ea typeface="Amiri" pitchFamily="2" charset="-78"/>
                 <a:cs typeface="Amiri" pitchFamily="2" charset="-78"/>
               </a:rPr>
               <a:t>لَوْ لَمْ تُقْبَلْ، مَاذَا سَتَفْعَلُ؟</a:t>
@@ -15222,6 +15348,7 @@
                   <a:srgbClr val="D4AF37"/>
                 </a:solidFill>
                 <a:latin typeface="Amiri" pitchFamily="2" charset="-78"/>
+                <a:ea typeface="Amiri" pitchFamily="2" charset="-78"/>
                 <a:cs typeface="Amiri" pitchFamily="2" charset="-78"/>
               </a:rPr>
               <a:t>م</a:t>
@@ -15542,6 +15669,7 @@
                   <a:srgbClr val="8A6D1E"/>
                 </a:solidFill>
                 <a:latin typeface="Amiri" pitchFamily="2" charset="-78"/>
+                <a:ea typeface="Amiri" pitchFamily="2" charset="-78"/>
                 <a:cs typeface="Amiri" pitchFamily="2" charset="-78"/>
               </a:rPr>
               <a:t>الطَّلَبُ وَالمُقَابَلَةُ</a:t>
@@ -15822,6 +15950,7 @@
                   <a:srgbClr val="1B3B6F"/>
                 </a:solidFill>
                 <a:latin typeface="Amiri" pitchFamily="2" charset="-78"/>
+                <a:ea typeface="Amiri" pitchFamily="2" charset="-78"/>
                 <a:cs typeface="Amiri" pitchFamily="2" charset="-78"/>
               </a:rPr>
               <a:t>نَعَمْ / لَا، …</a:t>
@@ -15898,6 +16027,7 @@
                   <a:srgbClr val="1B3B6F"/>
                 </a:solidFill>
                 <a:latin typeface="Amiri" pitchFamily="2" charset="-78"/>
+                <a:ea typeface="Amiri" pitchFamily="2" charset="-78"/>
                 <a:cs typeface="Amiri" pitchFamily="2" charset="-78"/>
               </a:rPr>
               <a:t>هَلْ عِنْدَكَ سِيرَةٌ ذَاتِيَّةٌ؟</a:t>
@@ -16066,6 +16196,7 @@
                   <a:srgbClr val="1B3B6F"/>
                 </a:solidFill>
                 <a:latin typeface="Amiri" pitchFamily="2" charset="-78"/>
+                <a:ea typeface="Amiri" pitchFamily="2" charset="-78"/>
                 <a:cs typeface="Amiri" pitchFamily="2" charset="-78"/>
               </a:rPr>
               <a:t>نَعَمْ، قُمْتُ بِمُقَابَلَةٍ لِعَمَلٍ فِي …</a:t>
@@ -16142,6 +16273,7 @@
                   <a:srgbClr val="1B3B6F"/>
                 </a:solidFill>
                 <a:latin typeface="Amiri" pitchFamily="2" charset="-78"/>
+                <a:ea typeface="Amiri" pitchFamily="2" charset="-78"/>
                 <a:cs typeface="Amiri" pitchFamily="2" charset="-78"/>
               </a:rPr>
               <a:t>هَلْ قُمْتَ بِمُقَابَلَةٍ مِنْ قَبْلُ؟</a:t>
@@ -16310,6 +16442,7 @@
                   <a:srgbClr val="1B3B6F"/>
                 </a:solidFill>
                 <a:latin typeface="Amiri" pitchFamily="2" charset="-78"/>
+                <a:ea typeface="Amiri" pitchFamily="2" charset="-78"/>
                 <a:cs typeface="Amiri" pitchFamily="2" charset="-78"/>
               </a:rPr>
               <a:t>أَلْبَسُ …</a:t>
@@ -16386,6 +16519,7 @@
                   <a:srgbClr val="1B3B6F"/>
                 </a:solidFill>
                 <a:latin typeface="Amiri" pitchFamily="2" charset="-78"/>
+                <a:ea typeface="Amiri" pitchFamily="2" charset="-78"/>
                 <a:cs typeface="Amiri" pitchFamily="2" charset="-78"/>
               </a:rPr>
               <a:t>مَاذَا تَلْبَسُ فِي المُقَابَلَةِ؟</a:t>
@@ -16554,6 +16688,7 @@
                   <a:srgbClr val="1B3B6F"/>
                 </a:solidFill>
                 <a:latin typeface="Amiri" pitchFamily="2" charset="-78"/>
+                <a:ea typeface="Amiri" pitchFamily="2" charset="-78"/>
                 <a:cs typeface="Amiri" pitchFamily="2" charset="-78"/>
               </a:rPr>
               <a:t>نَعَمْ، قَلِيلًا، لٰكِنِّي …</a:t>
@@ -16630,6 +16765,7 @@
                   <a:srgbClr val="1B3B6F"/>
                 </a:solidFill>
                 <a:latin typeface="Amiri" pitchFamily="2" charset="-78"/>
+                <a:ea typeface="Amiri" pitchFamily="2" charset="-78"/>
                 <a:cs typeface="Amiri" pitchFamily="2" charset="-78"/>
               </a:rPr>
               <a:t>هَلْ تَشْعُرُ بِالتَّوَتُّرِ قَبْلَ المُقَابَلَةِ؟</a:t>
@@ -16798,6 +16934,7 @@
                   <a:srgbClr val="1B3B6F"/>
                 </a:solidFill>
                 <a:latin typeface="Amiri" pitchFamily="2" charset="-78"/>
+                <a:ea typeface="Amiri" pitchFamily="2" charset="-78"/>
                 <a:cs typeface="Amiri" pitchFamily="2" charset="-78"/>
               </a:rPr>
               <a:t>أُرِيدُ أَنْ أَتَقَدَّمَ لِوَظِيفَةِ …</a:t>
@@ -16874,6 +17011,7 @@
                   <a:srgbClr val="1B3B6F"/>
                 </a:solidFill>
                 <a:latin typeface="Amiri" pitchFamily="2" charset="-78"/>
+                <a:ea typeface="Amiri" pitchFamily="2" charset="-78"/>
                 <a:cs typeface="Amiri" pitchFamily="2" charset="-78"/>
               </a:rPr>
               <a:t>مَا الوَظِيفَةُ الَّتِي تُرِيدُ أَنْ تَتَقَدَّمَ لَهَا؟</a:t>
@@ -17028,6 +17166,7 @@
                   <a:srgbClr val="1B3B6F"/>
                 </a:solidFill>
                 <a:latin typeface="Amiri" pitchFamily="2" charset="-78"/>
+                <a:ea typeface="Amiri" pitchFamily="2" charset="-78"/>
                 <a:cs typeface="Amiri" pitchFamily="2" charset="-78"/>
               </a:rPr>
               <a:t>عَفْوًا، هَلْ يُمْكِنُ أَنْ تُعِيدَ السُّؤَالَ؟</a:t>
@@ -17161,6 +17300,7 @@
                   <a:srgbClr val="D4AF37"/>
                 </a:solidFill>
                 <a:latin typeface="Amiri" pitchFamily="2" charset="-78"/>
+                <a:ea typeface="Amiri" pitchFamily="2" charset="-78"/>
                 <a:cs typeface="Amiri" pitchFamily="2" charset="-78"/>
               </a:rPr>
               <a:t>م</a:t>
@@ -17481,6 +17621,7 @@
                   <a:srgbClr val="8A6D1E"/>
                 </a:solidFill>
                 <a:latin typeface="Amiri" pitchFamily="2" charset="-78"/>
+                <a:ea typeface="Amiri" pitchFamily="2" charset="-78"/>
                 <a:cs typeface="Amiri" pitchFamily="2" charset="-78"/>
               </a:rPr>
               <a:t>الاسْتِعْدَادُ لِلْعَمَلِ</a:t>
@@ -17761,6 +17902,7 @@
                   <a:srgbClr val="1B3B6F"/>
                 </a:solidFill>
                 <a:latin typeface="Amiri" pitchFamily="2" charset="-78"/>
+                <a:ea typeface="Amiri" pitchFamily="2" charset="-78"/>
                 <a:cs typeface="Amiri" pitchFamily="2" charset="-78"/>
               </a:rPr>
               <a:t>أَقْرَأُ عَنِ … ثُمَّ أَتَدَرَّبُ …</a:t>
@@ -17837,6 +17979,7 @@
                   <a:srgbClr val="1B3B6F"/>
                 </a:solidFill>
                 <a:latin typeface="Amiri" pitchFamily="2" charset="-78"/>
+                <a:ea typeface="Amiri" pitchFamily="2" charset="-78"/>
                 <a:cs typeface="Amiri" pitchFamily="2" charset="-78"/>
               </a:rPr>
               <a:t>كَيْفَ تَسْتَعِدُّ لِلْمُقَابَلَةِ؟</a:t>
@@ -17940,6 +18083,7 @@
                   <a:srgbClr val="1B3B6F"/>
                 </a:solidFill>
                 <a:latin typeface="Amiri" pitchFamily="2" charset="-78"/>
+                <a:ea typeface="Amiri" pitchFamily="2" charset="-78"/>
                 <a:cs typeface="Amiri" pitchFamily="2" charset="-78"/>
               </a:rPr>
               <a:t>كَانَتِ المُقَابَلَةُ … سَأَلُونِي … فَأَخْبَرْتُهُمْ …</a:t>
@@ -18016,6 +18160,7 @@
                   <a:srgbClr val="1B3B6F"/>
                 </a:solidFill>
                 <a:latin typeface="Amiri" pitchFamily="2" charset="-78"/>
+                <a:ea typeface="Amiri" pitchFamily="2" charset="-78"/>
                 <a:cs typeface="Amiri" pitchFamily="2" charset="-78"/>
               </a:rPr>
               <a:t>صِفْ مُقَابَلَةً قُمْتَ بِهَا.</a:t>
@@ -18119,6 +18264,7 @@
                   <a:srgbClr val="1B3B6F"/>
                 </a:solidFill>
                 <a:latin typeface="Amiri" pitchFamily="2" charset="-78"/>
+                <a:ea typeface="Amiri" pitchFamily="2" charset="-78"/>
                 <a:cs typeface="Amiri" pitchFamily="2" charset="-78"/>
               </a:rPr>
               <a:t>أَكْتُبُ فِيهَا …</a:t>
@@ -18195,6 +18341,7 @@
                   <a:srgbClr val="1B3B6F"/>
                 </a:solidFill>
                 <a:latin typeface="Amiri" pitchFamily="2" charset="-78"/>
+                <a:ea typeface="Amiri" pitchFamily="2" charset="-78"/>
                 <a:cs typeface="Amiri" pitchFamily="2" charset="-78"/>
               </a:rPr>
               <a:t>مَا الَّذِي تَكْتُبُهُ فِي سِيرَتِكَ الذَّاتِيَّةِ؟</a:t>
@@ -18298,6 +18445,7 @@
                   <a:srgbClr val="1B3B6F"/>
                 </a:solidFill>
                 <a:latin typeface="Amiri" pitchFamily="2" charset="-78"/>
+                <a:ea typeface="Amiri" pitchFamily="2" charset="-78"/>
                 <a:cs typeface="Amiri" pitchFamily="2" charset="-78"/>
               </a:rPr>
               <a:t>أَصْعَبُ سُؤَالٍ … لِأَنَّ …</a:t>
@@ -18374,6 +18522,7 @@
                   <a:srgbClr val="1B3B6F"/>
                 </a:solidFill>
                 <a:latin typeface="Amiri" pitchFamily="2" charset="-78"/>
+                <a:ea typeface="Amiri" pitchFamily="2" charset="-78"/>
                 <a:cs typeface="Amiri" pitchFamily="2" charset="-78"/>
               </a:rPr>
               <a:t>مَا أَصْعَبُ سُؤَالٍ فِي المُقَابَلَاتِ؟</a:t>
@@ -18477,6 +18626,7 @@
                   <a:srgbClr val="1B3B6F"/>
                 </a:solidFill>
                 <a:latin typeface="Amiri" pitchFamily="2" charset="-78"/>
+                <a:ea typeface="Amiri" pitchFamily="2" charset="-78"/>
                 <a:cs typeface="Amiri" pitchFamily="2" charset="-78"/>
               </a:rPr>
               <a:t>سَأَتَقَدَّمُ لِوَظِيفَةٍ فِي … لِأَنَّ …</a:t>
@@ -18553,6 +18703,7 @@
                   <a:srgbClr val="1B3B6F"/>
                 </a:solidFill>
                 <a:latin typeface="Amiri" pitchFamily="2" charset="-78"/>
+                <a:ea typeface="Amiri" pitchFamily="2" charset="-78"/>
                 <a:cs typeface="Amiri" pitchFamily="2" charset="-78"/>
               </a:rPr>
               <a:t>لِأَيِّ وَظِيفَةٍ سَتَتَقَدَّمُ فِي الصَّيْفِ؟</a:t>
@@ -18762,6 +18913,7 @@
                   <a:srgbClr val="D4AF37"/>
                 </a:solidFill>
                 <a:latin typeface="Amiri" pitchFamily="2" charset="-78"/>
+                <a:ea typeface="Amiri" pitchFamily="2" charset="-78"/>
                 <a:cs typeface="Amiri" pitchFamily="2" charset="-78"/>
               </a:rPr>
               <a:t>م</a:t>
@@ -19082,6 +19234,7 @@
                   <a:srgbClr val="8A6D1E"/>
                 </a:solidFill>
                 <a:latin typeface="Amiri" pitchFamily="2" charset="-78"/>
+                <a:ea typeface="Amiri" pitchFamily="2" charset="-78"/>
                 <a:cs typeface="Amiri" pitchFamily="2" charset="-78"/>
               </a:rPr>
               <a:t>التَّوْظِيفُ اليَوْمَ</a:t>
@@ -19362,6 +19515,7 @@
                   <a:srgbClr val="1B3B6F"/>
                 </a:solidFill>
                 <a:latin typeface="Amiri" pitchFamily="2" charset="-78"/>
+                <a:ea typeface="Amiri" pitchFamily="2" charset="-78"/>
                 <a:cs typeface="Amiri" pitchFamily="2" charset="-78"/>
               </a:rPr>
               <a:t>صَحِيحٌ أَنَّ … غَيْرَ أَنَّ …</a:t>
@@ -19438,6 +19592,7 @@
                   <a:srgbClr val="1B3B6F"/>
                 </a:solidFill>
                 <a:latin typeface="Amiri" pitchFamily="2" charset="-78"/>
+                <a:ea typeface="Amiri" pitchFamily="2" charset="-78"/>
                 <a:cs typeface="Amiri" pitchFamily="2" charset="-78"/>
               </a:rPr>
               <a:t>هَلِ المُقَابَلَةُ أَفْضَلُ طَرِيقَةٍ لِاخْتِيَارِ المُوَظَّفِ؟</a:t>
@@ -19541,6 +19696,7 @@
                   <a:srgbClr val="1B3B6F"/>
                 </a:solidFill>
                 <a:latin typeface="Amiri" pitchFamily="2" charset="-78"/>
+                <a:ea typeface="Amiri" pitchFamily="2" charset="-78"/>
                 <a:cs typeface="Amiri" pitchFamily="2" charset="-78"/>
               </a:rPr>
               <a:t>لَا أَعْتَقِدُ ذٰلِكَ، لِأَنَّ …</a:t>
@@ -19617,6 +19773,7 @@
                   <a:srgbClr val="1B3B6F"/>
                 </a:solidFill>
                 <a:latin typeface="Amiri" pitchFamily="2" charset="-78"/>
+                <a:ea typeface="Amiri" pitchFamily="2" charset="-78"/>
                 <a:cs typeface="Amiri" pitchFamily="2" charset="-78"/>
               </a:rPr>
               <a:t>هَلْ يَجِبُ أَنْ يَطْلُبَ أَصْحَابُ العَمَلِ صُوَرًا فِي السِّيرَةِ الذَّاتِيَّةِ؟</a:t>
@@ -19720,6 +19877,7 @@
                   <a:srgbClr val="1B3B6F"/>
                 </a:solidFill>
                 <a:latin typeface="Amiri" pitchFamily="2" charset="-78"/>
+                <a:ea typeface="Amiri" pitchFamily="2" charset="-78"/>
                 <a:cs typeface="Amiri" pitchFamily="2" charset="-78"/>
               </a:rPr>
               <a:t>مِنْ نَاحِيَةٍ … وَمِنْ نَاحِيَةٍ أُخْرَى …</a:t>
@@ -19796,6 +19954,7 @@
                   <a:srgbClr val="1B3B6F"/>
                 </a:solidFill>
                 <a:latin typeface="Amiri" pitchFamily="2" charset="-78"/>
+                <a:ea typeface="Amiri" pitchFamily="2" charset="-78"/>
                 <a:cs typeface="Amiri" pitchFamily="2" charset="-78"/>
               </a:rPr>
               <a:t>مَا رَأْيُكَ فِي المُقَابَلَاتِ عَنْ بُعْدٍ؟</a:t>
@@ -19899,6 +20058,7 @@
                   <a:srgbClr val="1B3B6F"/>
                 </a:solidFill>
                 <a:latin typeface="Amiri" pitchFamily="2" charset="-78"/>
+                <a:ea typeface="Amiri" pitchFamily="2" charset="-78"/>
                 <a:cs typeface="Amiri" pitchFamily="2" charset="-78"/>
               </a:rPr>
               <a:t>كَانُوا يَجِدُونَهُ … أَمَّا اليَوْمَ فَيَتَقَدَّمُ …</a:t>
@@ -19975,6 +20135,7 @@
                   <a:srgbClr val="1B3B6F"/>
                 </a:solidFill>
                 <a:latin typeface="Amiri" pitchFamily="2" charset="-78"/>
+                <a:ea typeface="Amiri" pitchFamily="2" charset="-78"/>
                 <a:cs typeface="Amiri" pitchFamily="2" charset="-78"/>
               </a:rPr>
               <a:t>كَيْفَ كَانَ النَّاسُ يَجِدُونَ العَمَلَ فِي المَاضِي؟</a:t>
@@ -20078,6 +20239,7 @@
                   <a:srgbClr val="1B3B6F"/>
                 </a:solidFill>
                 <a:latin typeface="Amiri" pitchFamily="2" charset="-78"/>
+                <a:ea typeface="Amiri" pitchFamily="2" charset="-78"/>
                 <a:cs typeface="Amiri" pitchFamily="2" charset="-78"/>
               </a:rPr>
               <a:t>لَوْ كُنْتُ أُجْرِي مُقَابَلَةً، لَسَأَلْتُ …</a:t>
@@ -20154,6 +20316,7 @@
                   <a:srgbClr val="1B3B6F"/>
                 </a:solidFill>
                 <a:latin typeface="Amiri" pitchFamily="2" charset="-78"/>
+                <a:ea typeface="Amiri" pitchFamily="2" charset="-78"/>
                 <a:cs typeface="Amiri" pitchFamily="2" charset="-78"/>
               </a:rPr>
               <a:t>لَوْ كُنْتَ تُجْرِي مُقَابَلَةً، مَا السُّؤَالُ الَّذِي تَطْرَحُهُ؟</a:t>
@@ -20363,6 +20526,7 @@
                   <a:srgbClr val="D4AF37"/>
                 </a:solidFill>
                 <a:latin typeface="Amiri" pitchFamily="2" charset="-78"/>
+                <a:ea typeface="Amiri" pitchFamily="2" charset="-78"/>
                 <a:cs typeface="Amiri" pitchFamily="2" charset="-78"/>
               </a:rPr>
               <a:t>م</a:t>
@@ -20683,6 +20847,7 @@
                   <a:srgbClr val="8A6D1E"/>
                 </a:solidFill>
                 <a:latin typeface="Amiri" pitchFamily="2" charset="-78"/>
+                <a:ea typeface="Amiri" pitchFamily="2" charset="-78"/>
                 <a:cs typeface="Amiri" pitchFamily="2" charset="-78"/>
               </a:rPr>
               <a:t>آدَابُ الصَّفِّ</a:t>
@@ -22214,6 +22379,7 @@
                   <a:srgbClr val="D4AF37"/>
                 </a:solidFill>
                 <a:latin typeface="Amiri" pitchFamily="2" charset="-78"/>
+                <a:ea typeface="Amiri" pitchFamily="2" charset="-78"/>
                 <a:cs typeface="Amiri" pitchFamily="2" charset="-78"/>
               </a:rPr>
               <a:t>م</a:t>
@@ -22534,6 +22700,7 @@
                   <a:srgbClr val="8A6D1E"/>
                 </a:solidFill>
                 <a:latin typeface="Amiri" pitchFamily="2" charset="-78"/>
+                <a:ea typeface="Amiri" pitchFamily="2" charset="-78"/>
                 <a:cs typeface="Amiri" pitchFamily="2" charset="-78"/>
               </a:rPr>
               <a:t>نَمُوذَجُ الإِجَابَةِ</a:t>
@@ -22776,6 +22943,7 @@
                   <a:srgbClr val="1B3B6F"/>
                 </a:solidFill>
                 <a:latin typeface="Amiri" pitchFamily="2" charset="-78"/>
+                <a:ea typeface="Amiri" pitchFamily="2" charset="-78"/>
                 <a:cs typeface="Amiri" pitchFamily="2" charset="-78"/>
               </a:rPr>
               <a:t>نَعَمْ، كَتَبْتُهَا فِي حِصَّةِ المِهَنِ.</a:t>
@@ -22852,6 +23020,7 @@
                   <a:srgbClr val="1B3B6F"/>
                 </a:solidFill>
                 <a:latin typeface="Amiri" pitchFamily="2" charset="-78"/>
+                <a:ea typeface="Amiri" pitchFamily="2" charset="-78"/>
                 <a:cs typeface="Amiri" pitchFamily="2" charset="-78"/>
               </a:rPr>
               <a:t>هَلْ عِنْدَكَ سِيرَةٌ ذَاتِيَّةٌ؟</a:t>
@@ -22955,6 +23124,7 @@
                   <a:srgbClr val="1B3B6F"/>
                 </a:solidFill>
                 <a:latin typeface="Amiri" pitchFamily="2" charset="-78"/>
+                <a:ea typeface="Amiri" pitchFamily="2" charset="-78"/>
                 <a:cs typeface="Amiri" pitchFamily="2" charset="-78"/>
               </a:rPr>
               <a:t>نَعَمْ، قُمْتُ بِمُقَابَلَةٍ لِعَمَلٍ فِي مَقْهًى.</a:t>
@@ -23031,6 +23201,7 @@
                   <a:srgbClr val="1B3B6F"/>
                 </a:solidFill>
                 <a:latin typeface="Amiri" pitchFamily="2" charset="-78"/>
+                <a:ea typeface="Amiri" pitchFamily="2" charset="-78"/>
                 <a:cs typeface="Amiri" pitchFamily="2" charset="-78"/>
               </a:rPr>
               <a:t>هَلْ قُمْتَ بِمُقَابَلَةٍ مِنْ قَبْلُ؟</a:t>
@@ -23134,6 +23305,7 @@
                   <a:srgbClr val="1B3B6F"/>
                 </a:solidFill>
                 <a:latin typeface="Amiri" pitchFamily="2" charset="-78"/>
+                <a:ea typeface="Amiri" pitchFamily="2" charset="-78"/>
                 <a:cs typeface="Amiri" pitchFamily="2" charset="-78"/>
               </a:rPr>
               <a:t>أَلْبَسُ مَلَابِسَ رَسْمِيَّةً وَنَظِيفَةً.</a:t>
@@ -23210,6 +23382,7 @@
                   <a:srgbClr val="1B3B6F"/>
                 </a:solidFill>
                 <a:latin typeface="Amiri" pitchFamily="2" charset="-78"/>
+                <a:ea typeface="Amiri" pitchFamily="2" charset="-78"/>
                 <a:cs typeface="Amiri" pitchFamily="2" charset="-78"/>
               </a:rPr>
               <a:t>مَاذَا تَلْبَسُ فِي المُقَابَلَةِ؟</a:t>
@@ -23313,6 +23486,7 @@
                   <a:srgbClr val="1B3B6F"/>
                 </a:solidFill>
                 <a:latin typeface="Amiri" pitchFamily="2" charset="-78"/>
+                <a:ea typeface="Amiri" pitchFamily="2" charset="-78"/>
                 <a:cs typeface="Amiri" pitchFamily="2" charset="-78"/>
               </a:rPr>
               <a:t>نَعَمْ، قَلِيلًا، لٰكِنِّي أَتَدَرَّبُ قَبْلَهَا.</a:t>
@@ -23389,6 +23563,7 @@
                   <a:srgbClr val="1B3B6F"/>
                 </a:solidFill>
                 <a:latin typeface="Amiri" pitchFamily="2" charset="-78"/>
+                <a:ea typeface="Amiri" pitchFamily="2" charset="-78"/>
                 <a:cs typeface="Amiri" pitchFamily="2" charset="-78"/>
               </a:rPr>
               <a:t>هَلْ تَشْعُرُ بِالتَّوَتُّرِ قَبْلَ المُقَابَلَةِ؟</a:t>
@@ -23492,6 +23667,7 @@
                   <a:srgbClr val="1B3B6F"/>
                 </a:solidFill>
                 <a:latin typeface="Amiri" pitchFamily="2" charset="-78"/>
+                <a:ea typeface="Amiri" pitchFamily="2" charset="-78"/>
                 <a:cs typeface="Amiri" pitchFamily="2" charset="-78"/>
               </a:rPr>
               <a:t>أُرِيدُ أَنْ أَتَقَدَّمَ لِوَظِيفَةِ مُدَرِّبِ سِبَاحَةٍ.</a:t>
@@ -23568,6 +23744,7 @@
                   <a:srgbClr val="1B3B6F"/>
                 </a:solidFill>
                 <a:latin typeface="Amiri" pitchFamily="2" charset="-78"/>
+                <a:ea typeface="Amiri" pitchFamily="2" charset="-78"/>
                 <a:cs typeface="Amiri" pitchFamily="2" charset="-78"/>
               </a:rPr>
               <a:t>مَا الوَظِيفَةُ الَّتِي تُرِيدُ أَنْ تَتَقَدَّمَ لَهَا؟</a:t>
@@ -23777,6 +23954,7 @@
                   <a:srgbClr val="D4AF37"/>
                 </a:solidFill>
                 <a:latin typeface="Amiri" pitchFamily="2" charset="-78"/>
+                <a:ea typeface="Amiri" pitchFamily="2" charset="-78"/>
                 <a:cs typeface="Amiri" pitchFamily="2" charset="-78"/>
               </a:rPr>
               <a:t>م</a:t>
@@ -24097,6 +24275,7 @@
                   <a:srgbClr val="8A6D1E"/>
                 </a:solidFill>
                 <a:latin typeface="Amiri" pitchFamily="2" charset="-78"/>
+                <a:ea typeface="Amiri" pitchFamily="2" charset="-78"/>
                 <a:cs typeface="Amiri" pitchFamily="2" charset="-78"/>
               </a:rPr>
               <a:t>نَمُوذَجُ الإِجَابَةِ</a:t>
@@ -24339,6 +24518,7 @@
                   <a:srgbClr val="1B3B6F"/>
                 </a:solidFill>
                 <a:latin typeface="Amiri" pitchFamily="2" charset="-78"/>
+                <a:ea typeface="Amiri" pitchFamily="2" charset="-78"/>
                 <a:cs typeface="Amiri" pitchFamily="2" charset="-78"/>
               </a:rPr>
               <a:t>أَقْرَأُ عَنِ الشَّرِكَةِ وَأَتَعَرَّفُ عَلَى عَمَلِهَا، ثُمَّ أَتَدَرَّبُ عَلَى الأَسْئِلَةِ مَعَ أُمِّي.</a:t>
@@ -24415,6 +24595,7 @@
                   <a:srgbClr val="1B3B6F"/>
                 </a:solidFill>
                 <a:latin typeface="Amiri" pitchFamily="2" charset="-78"/>
+                <a:ea typeface="Amiri" pitchFamily="2" charset="-78"/>
                 <a:cs typeface="Amiri" pitchFamily="2" charset="-78"/>
               </a:rPr>
               <a:t>كَيْفَ تَسْتَعِدُّ لِلْمُقَابَلَةِ؟</a:t>
@@ -24518,6 +24699,7 @@
                   <a:srgbClr val="1B3B6F"/>
                 </a:solidFill>
                 <a:latin typeface="Amiri" pitchFamily="2" charset="-78"/>
+                <a:ea typeface="Amiri" pitchFamily="2" charset="-78"/>
                 <a:cs typeface="Amiri" pitchFamily="2" charset="-78"/>
               </a:rPr>
               <a:t>كَانَتِ المُقَابَلَةُ فِي مَطْعَمٍ، وَسَأَلُونِي عَنْ خِبْرَتِي، فَأَخْبَرْتُهُمْ عَنْ عَمَلِي فِي المَخْبَزِ، وَقَبِلُونِي.</a:t>
@@ -24594,6 +24776,7 @@
                   <a:srgbClr val="1B3B6F"/>
                 </a:solidFill>
                 <a:latin typeface="Amiri" pitchFamily="2" charset="-78"/>
+                <a:ea typeface="Amiri" pitchFamily="2" charset="-78"/>
                 <a:cs typeface="Amiri" pitchFamily="2" charset="-78"/>
               </a:rPr>
               <a:t>صِفْ مُقَابَلَةً قُمْتَ بِهَا.</a:t>
@@ -24697,6 +24880,7 @@
                   <a:srgbClr val="1B3B6F"/>
                 </a:solidFill>
                 <a:latin typeface="Amiri" pitchFamily="2" charset="-78"/>
+                <a:ea typeface="Amiri" pitchFamily="2" charset="-78"/>
                 <a:cs typeface="Amiri" pitchFamily="2" charset="-78"/>
               </a:rPr>
               <a:t>أَكْتُبُ فِيهَا دِرَاسَتِي وَمَهَارَاتِي وَخِبْرَاتِي فِي التَّطَوُّعِ، وَأُرَاجِعُهَا بِدِقَّةٍ قَبْلَ أَنْ أُرْسِلَهَا.</a:t>
@@ -24773,6 +24957,7 @@
                   <a:srgbClr val="1B3B6F"/>
                 </a:solidFill>
                 <a:latin typeface="Amiri" pitchFamily="2" charset="-78"/>
+                <a:ea typeface="Amiri" pitchFamily="2" charset="-78"/>
                 <a:cs typeface="Amiri" pitchFamily="2" charset="-78"/>
               </a:rPr>
               <a:t>مَا الَّذِي تَكْتُبُهُ فِي سِيرَتِكَ الذَّاتِيَّةِ؟</a:t>
@@ -24876,6 +25061,7 @@
                   <a:srgbClr val="1B3B6F"/>
                 </a:solidFill>
                 <a:latin typeface="Amiri" pitchFamily="2" charset="-78"/>
+                <a:ea typeface="Amiri" pitchFamily="2" charset="-78"/>
                 <a:cs typeface="Amiri" pitchFamily="2" charset="-78"/>
               </a:rPr>
               <a:t>أَصْعَبُ سُؤَالٍ هُوَ "مَا نُقْطَةُ ضَعْفِكَ؟"، لِأَنَّنَا نَخَافُ أَنْ نُعْطِيَ صُورَةً سَيِّئَةً عَنْ أَنْفُسِنَا.</a:t>
@@ -24952,6 +25138,7 @@
                   <a:srgbClr val="1B3B6F"/>
                 </a:solidFill>
                 <a:latin typeface="Amiri" pitchFamily="2" charset="-78"/>
+                <a:ea typeface="Amiri" pitchFamily="2" charset="-78"/>
                 <a:cs typeface="Amiri" pitchFamily="2" charset="-78"/>
               </a:rPr>
               <a:t>مَا أَصْعَبُ سُؤَالٍ فِي المُقَابَلَاتِ؟</a:t>
@@ -25055,6 +25242,7 @@
                   <a:srgbClr val="1B3B6F"/>
                 </a:solidFill>
                 <a:latin typeface="Amiri" pitchFamily="2" charset="-78"/>
+                <a:ea typeface="Amiri" pitchFamily="2" charset="-78"/>
                 <a:cs typeface="Amiri" pitchFamily="2" charset="-78"/>
               </a:rPr>
               <a:t>سَأَتَقَدَّمُ لِوَظِيفَةٍ فِي مُخَيَّمٍ لِلْأَطْفَالِ، لِأَنِّي أُحِبُّ الرِّيَاضَةَ، وَأَسْتَطِيعُ أَنْ أُدَرِّبَهُمْ.</a:t>
@@ -25131,6 +25319,7 @@
                   <a:srgbClr val="1B3B6F"/>
                 </a:solidFill>
                 <a:latin typeface="Amiri" pitchFamily="2" charset="-78"/>
+                <a:ea typeface="Amiri" pitchFamily="2" charset="-78"/>
                 <a:cs typeface="Amiri" pitchFamily="2" charset="-78"/>
               </a:rPr>
               <a:t>لِأَيِّ وَظِيفَةٍ سَتَتَقَدَّمُ فِي الصَّيْفِ؟</a:t>
@@ -25340,6 +25529,7 @@
                   <a:srgbClr val="D4AF37"/>
                 </a:solidFill>
                 <a:latin typeface="Amiri" pitchFamily="2" charset="-78"/>
+                <a:ea typeface="Amiri" pitchFamily="2" charset="-78"/>
                 <a:cs typeface="Amiri" pitchFamily="2" charset="-78"/>
               </a:rPr>
               <a:t>م</a:t>
@@ -25660,6 +25850,7 @@
                   <a:srgbClr val="8A6D1E"/>
                 </a:solidFill>
                 <a:latin typeface="Amiri" pitchFamily="2" charset="-78"/>
+                <a:ea typeface="Amiri" pitchFamily="2" charset="-78"/>
                 <a:cs typeface="Amiri" pitchFamily="2" charset="-78"/>
               </a:rPr>
               <a:t>نَمُوذَجُ الإِجَابَةِ</a:t>
@@ -25902,6 +26093,7 @@
                   <a:srgbClr val="1B3B6F"/>
                 </a:solidFill>
                 <a:latin typeface="Amiri" pitchFamily="2" charset="-78"/>
+                <a:ea typeface="Amiri" pitchFamily="2" charset="-78"/>
                 <a:cs typeface="Amiri" pitchFamily="2" charset="-78"/>
               </a:rPr>
               <a:t>صَحِيحٌ أَنَّهَا تَكْشِفُ شَخْصِيَّةَ المُتَقَدِّمِ، غَيْرَ أَنَّ بَعْضَ الأَكْفَاءِ يَتَوَتَّرُونَ فِيهَا، فَلَا تَظْهَرُ قُدُرَاتُهُمُ الحَقِيقِيَّةُ.</a:t>
@@ -25978,6 +26170,7 @@
                   <a:srgbClr val="1B3B6F"/>
                 </a:solidFill>
                 <a:latin typeface="Amiri" pitchFamily="2" charset="-78"/>
+                <a:ea typeface="Amiri" pitchFamily="2" charset="-78"/>
                 <a:cs typeface="Amiri" pitchFamily="2" charset="-78"/>
               </a:rPr>
               <a:t>هَلِ المُقَابَلَةُ أَفْضَلُ طَرِيقَةٍ لِاخْتِيَارِ المُوَظَّفِ؟</a:t>
@@ -26081,6 +26274,7 @@
                   <a:srgbClr val="1B3B6F"/>
                 </a:solidFill>
                 <a:latin typeface="Amiri" pitchFamily="2" charset="-78"/>
+                <a:ea typeface="Amiri" pitchFamily="2" charset="-78"/>
                 <a:cs typeface="Amiri" pitchFamily="2" charset="-78"/>
               </a:rPr>
               <a:t>لَا أَعْتَقِدُ ذٰلِكَ، لِأَنَّ الصُّورَةَ قَدْ تُؤَدِّي إِلَى التَّمْيِيزِ بِسَبَبِ الشَّكْلِ أَوِ العُمْرِ، بَدَلًا مِنَ المَهَارَاتِ.</a:t>
@@ -26160,6 +26354,7 @@
                   <a:srgbClr val="1B3B6F"/>
                 </a:solidFill>
                 <a:latin typeface="Amiri" pitchFamily="2" charset="-78"/>
+                <a:ea typeface="Amiri" pitchFamily="2" charset="-78"/>
                 <a:cs typeface="Amiri" pitchFamily="2" charset="-78"/>
               </a:rPr>
               <a:t>هَلْ يَجِبُ أَنْ يَطْلُبَ أَصْحَابُ العَمَلِ صُوَرًا فِي السِّيرَةِ الذَّاتِيَّةِ؟</a:t>
@@ -26263,6 +26458,7 @@
                   <a:srgbClr val="1B3B6F"/>
                 </a:solidFill>
                 <a:latin typeface="Amiri" pitchFamily="2" charset="-78"/>
+                <a:ea typeface="Amiri" pitchFamily="2" charset="-78"/>
                 <a:cs typeface="Amiri" pitchFamily="2" charset="-78"/>
               </a:rPr>
               <a:t>مِنْ نَاحِيَةٍ، تُوَفِّرُ الوَقْتَ وَالسَّفَرَ، وَمِنْ نَاحِيَةٍ أُخْرَى، يَصْعُبُ فِيهَا بِنَاءُ عَلَاقَةٍ إِنْسَانِيَّةٍ مَعَ المُحَاوِرِ.</a:t>
@@ -26339,6 +26535,7 @@
                   <a:srgbClr val="1B3B6F"/>
                 </a:solidFill>
                 <a:latin typeface="Amiri" pitchFamily="2" charset="-78"/>
+                <a:ea typeface="Amiri" pitchFamily="2" charset="-78"/>
                 <a:cs typeface="Amiri" pitchFamily="2" charset="-78"/>
               </a:rPr>
               <a:t>مَا رَأْيُكَ فِي المُقَابَلَاتِ عَنْ بُعْدٍ؟</a:t>
@@ -26548,6 +26745,7 @@
                   <a:srgbClr val="D4AF37"/>
                 </a:solidFill>
                 <a:latin typeface="Amiri" pitchFamily="2" charset="-78"/>
+                <a:ea typeface="Amiri" pitchFamily="2" charset="-78"/>
                 <a:cs typeface="Amiri" pitchFamily="2" charset="-78"/>
               </a:rPr>
               <a:t>م</a:t>
@@ -26868,6 +27066,7 @@
                   <a:srgbClr val="8A6D1E"/>
                 </a:solidFill>
                 <a:latin typeface="Amiri" pitchFamily="2" charset="-78"/>
+                <a:ea typeface="Amiri" pitchFamily="2" charset="-78"/>
                 <a:cs typeface="Amiri" pitchFamily="2" charset="-78"/>
               </a:rPr>
               <a:t>نَمُوذَجُ الإِجَابَةِ</a:t>
@@ -27110,6 +27309,7 @@
                   <a:srgbClr val="1B3B6F"/>
                 </a:solidFill>
                 <a:latin typeface="Amiri" pitchFamily="2" charset="-78"/>
+                <a:ea typeface="Amiri" pitchFamily="2" charset="-78"/>
                 <a:cs typeface="Amiri" pitchFamily="2" charset="-78"/>
               </a:rPr>
               <a:t>كَانُوا يَجِدُونَهُ عَنْ طَرِيقِ الأَقَارِبِ وَإِعْلَانَاتِ الصُّحُفِ، أَمَّا اليَوْمَ فَيَتَقَدَّمُ النَّاسُ لِعَشَرَاتِ الوَظَائِفِ عَلَى الإِنْتَرْنِتِ فِي يَوْمٍ وَاحِدٍ.</a:t>
@@ -27186,6 +27386,7 @@
                   <a:srgbClr val="1B3B6F"/>
                 </a:solidFill>
                 <a:latin typeface="Amiri" pitchFamily="2" charset="-78"/>
+                <a:ea typeface="Amiri" pitchFamily="2" charset="-78"/>
                 <a:cs typeface="Amiri" pitchFamily="2" charset="-78"/>
               </a:rPr>
               <a:t>كَيْفَ كَانَ النَّاسُ يَجِدُونَ العَمَلَ فِي المَاضِي؟</a:t>
@@ -27289,6 +27490,7 @@
                   <a:srgbClr val="1B3B6F"/>
                 </a:solidFill>
                 <a:latin typeface="Amiri" pitchFamily="2" charset="-78"/>
+                <a:ea typeface="Amiri" pitchFamily="2" charset="-78"/>
                 <a:cs typeface="Amiri" pitchFamily="2" charset="-78"/>
               </a:rPr>
               <a:t>لَوْ كُنْتُ أُجْرِي مُقَابَلَةً، لَسَأَلْتُ: "حَدِّثْنِي عَنْ مَرَّةٍ سَاعَدْتَ فِيهَا زَمِيلًا دُونَ أَنْ يَطْلُبَ مِنْكَ أَحَدٌ ذٰلِكَ."</a:t>
@@ -27368,6 +27570,7 @@
                   <a:srgbClr val="1B3B6F"/>
                 </a:solidFill>
                 <a:latin typeface="Amiri" pitchFamily="2" charset="-78"/>
+                <a:ea typeface="Amiri" pitchFamily="2" charset="-78"/>
                 <a:cs typeface="Amiri" pitchFamily="2" charset="-78"/>
               </a:rPr>
               <a:t>لَوْ كُنْتَ تُجْرِي مُقَابَلَةً، مَا السُّؤَالُ الَّذِي تَطْرَحُهُ؟</a:t>
@@ -27577,6 +27780,7 @@
                   <a:srgbClr val="D4AF37"/>
                 </a:solidFill>
                 <a:latin typeface="Amiri" pitchFamily="2" charset="-78"/>
+                <a:ea typeface="Amiri" pitchFamily="2" charset="-78"/>
                 <a:cs typeface="Amiri" pitchFamily="2" charset="-78"/>
               </a:rPr>
               <a:t>م</a:t>
@@ -27897,6 +28101,7 @@
                   <a:srgbClr val="8A6D1E"/>
                 </a:solidFill>
                 <a:latin typeface="Amiri" pitchFamily="2" charset="-78"/>
+                <a:ea typeface="Amiri" pitchFamily="2" charset="-78"/>
                 <a:cs typeface="Amiri" pitchFamily="2" charset="-78"/>
               </a:rPr>
               <a:t>قَيِّمْ عَمَلَكَ</a:t>
@@ -29141,6 +29346,7 @@
                   <a:srgbClr val="FFFFFF"/>
                 </a:solidFill>
                 <a:latin typeface="Amiri" pitchFamily="2" charset="-78"/>
+                <a:ea typeface="Amiri" pitchFamily="2" charset="-78"/>
                 <a:cs typeface="Amiri" pitchFamily="2" charset="-78"/>
               </a:rPr>
               <a:t>أَحْسَنْتُمْ! إِلَى اللِّقَاءِ</a:t>
@@ -29293,6 +29499,7 @@
                   <a:srgbClr val="D4AF37"/>
                 </a:solidFill>
                 <a:latin typeface="Amiri" pitchFamily="2" charset="-78"/>
+                <a:ea typeface="Amiri" pitchFamily="2" charset="-78"/>
                 <a:cs typeface="Amiri" pitchFamily="2" charset="-78"/>
               </a:rPr>
               <a:t>وَرْشَةُ الكِتَابَةِ</a:t>
@@ -29426,6 +29633,7 @@
                   <a:srgbClr val="D4AF37"/>
                 </a:solidFill>
                 <a:latin typeface="Amiri" pitchFamily="2" charset="-78"/>
+                <a:ea typeface="Amiri" pitchFamily="2" charset="-78"/>
                 <a:cs typeface="Amiri" pitchFamily="2" charset="-78"/>
               </a:rPr>
               <a:t>م</a:t>
@@ -29746,6 +29954,7 @@
                   <a:srgbClr val="8A6D1E"/>
                 </a:solidFill>
                 <a:latin typeface="Amiri" pitchFamily="2" charset="-78"/>
+                <a:ea typeface="Amiri" pitchFamily="2" charset="-78"/>
                 <a:cs typeface="Amiri" pitchFamily="2" charset="-78"/>
               </a:rPr>
               <a:t>خَرِيطَةُ الوَرْشَةِ</a:t>
@@ -30060,6 +30269,7 @@
                   <a:srgbClr val="1B3B6F"/>
                 </a:solidFill>
                 <a:latin typeface="Amiri" pitchFamily="2" charset="-78"/>
+                <a:ea typeface="Amiri" pitchFamily="2" charset="-78"/>
                 <a:cs typeface="Amiri" pitchFamily="2" charset="-78"/>
               </a:rPr>
               <a:t>كَيْفَ</a:t>
@@ -30336,6 +30546,7 @@
                   <a:srgbClr val="1E6B52"/>
                 </a:solidFill>
                 <a:latin typeface="Amiri" pitchFamily="2" charset="-78"/>
+                <a:ea typeface="Amiri" pitchFamily="2" charset="-78"/>
                 <a:cs typeface="Amiri" pitchFamily="2" charset="-78"/>
               </a:rPr>
               <a:t>تَمْثِيلُ الدَّوْرِ</a:t>
@@ -30612,6 +30823,7 @@
                   <a:srgbClr val="8A6D1E"/>
                 </a:solidFill>
                 <a:latin typeface="Amiri" pitchFamily="2" charset="-78"/>
+                <a:ea typeface="Amiri" pitchFamily="2" charset="-78"/>
                 <a:cs typeface="Amiri" pitchFamily="2" charset="-78"/>
               </a:rPr>
               <a:t>النَّمُوذَجُ</a:t>
@@ -30888,6 +31100,7 @@
                   <a:srgbClr val="1E6B52"/>
                 </a:solidFill>
                 <a:latin typeface="Amiri" pitchFamily="2" charset="-78"/>
+                <a:ea typeface="Amiri" pitchFamily="2" charset="-78"/>
                 <a:cs typeface="Amiri" pitchFamily="2" charset="-78"/>
               </a:rPr>
               <a:t>المُحَادَثَةُ</a:t>
@@ -31164,6 +31377,7 @@
                   <a:srgbClr val="8A6D1E"/>
                 </a:solidFill>
                 <a:latin typeface="Amiri" pitchFamily="2" charset="-78"/>
+                <a:ea typeface="Amiri" pitchFamily="2" charset="-78"/>
                 <a:cs typeface="Amiri" pitchFamily="2" charset="-78"/>
               </a:rPr>
               <a:t>قَيِّمْ</a:t>
@@ -31407,6 +31621,7 @@
                   <a:srgbClr val="D4AF37"/>
                 </a:solidFill>
                 <a:latin typeface="Amiri" pitchFamily="2" charset="-78"/>
+                <a:ea typeface="Amiri" pitchFamily="2" charset="-78"/>
                 <a:cs typeface="Amiri" pitchFamily="2" charset="-78"/>
               </a:rPr>
               <a:t>م</a:t>
@@ -31727,6 +31942,7 @@
                   <a:srgbClr val="8A6D1E"/>
                 </a:solidFill>
                 <a:latin typeface="Amiri" pitchFamily="2" charset="-78"/>
+                <a:ea typeface="Amiri" pitchFamily="2" charset="-78"/>
                 <a:cs typeface="Amiri" pitchFamily="2" charset="-78"/>
               </a:rPr>
               <a:t>امْتِحَانُ التَّحَدُّثِ</a:t>
@@ -32351,6 +32567,7 @@
                   <a:srgbClr val="1B3B6F"/>
                 </a:solidFill>
                 <a:latin typeface="Amiri" pitchFamily="2" charset="-78"/>
+                <a:ea typeface="Amiri" pitchFamily="2" charset="-78"/>
                 <a:cs typeface="Amiri" pitchFamily="2" charset="-78"/>
               </a:rPr>
               <a:t>عَفْوًا، هَلْ يُمْكِنُ أَنْ تُعِيدَ السُّؤَالَ؟</a:t>
@@ -32450,6 +32667,7 @@
                   <a:srgbClr val="1B3B6F"/>
                 </a:solidFill>
                 <a:latin typeface="Amiri" pitchFamily="2" charset="-78"/>
+                <a:ea typeface="Amiri" pitchFamily="2" charset="-78"/>
                 <a:cs typeface="Amiri" pitchFamily="2" charset="-78"/>
               </a:rPr>
               <a:t>لَحْظَةً، دَعْنِي أُفَكِّرُ …</a:t>
@@ -32549,6 +32767,7 @@
                   <a:srgbClr val="1B3B6F"/>
                 </a:solidFill>
                 <a:latin typeface="Amiri" pitchFamily="2" charset="-78"/>
+                <a:ea typeface="Amiri" pitchFamily="2" charset="-78"/>
                 <a:cs typeface="Amiri" pitchFamily="2" charset="-78"/>
               </a:rPr>
               <a:t>أَقْصِدُ …</a:t>
@@ -32720,6 +32939,7 @@
                   <a:srgbClr val="D4AF37"/>
                 </a:solidFill>
                 <a:latin typeface="Amiri" pitchFamily="2" charset="-78"/>
+                <a:ea typeface="Amiri" pitchFamily="2" charset="-78"/>
                 <a:cs typeface="Amiri" pitchFamily="2" charset="-78"/>
               </a:rPr>
               <a:t>م</a:t>
@@ -33040,6 +33260,7 @@
                   <a:srgbClr val="8A6D1E"/>
                 </a:solidFill>
                 <a:latin typeface="Amiri" pitchFamily="2" charset="-78"/>
+                <a:ea typeface="Amiri" pitchFamily="2" charset="-78"/>
                 <a:cs typeface="Amiri" pitchFamily="2" charset="-78"/>
               </a:rPr>
               <a:t>التَّقَدُّمُ لِوَظِيفَةٍ</a:t>
@@ -33343,6 +33564,7 @@
                   <a:srgbClr val="1B3B6F"/>
                 </a:solidFill>
                 <a:latin typeface="Amiri" pitchFamily="2" charset="-78"/>
+                <a:ea typeface="Amiri" pitchFamily="2" charset="-78"/>
                 <a:cs typeface="Amiri" pitchFamily="2" charset="-78"/>
               </a:rPr>
               <a:t>إِعْلَانُ وَظِيفَةٍ</a:t>
@@ -33500,6 +33722,7 @@
                   <a:srgbClr val="1B3B6F"/>
                 </a:solidFill>
                 <a:latin typeface="Amiri" pitchFamily="2" charset="-78"/>
+                <a:ea typeface="Amiri" pitchFamily="2" charset="-78"/>
                 <a:cs typeface="Amiri" pitchFamily="2" charset="-78"/>
               </a:rPr>
               <a:t>وَظِيفَةٌ شَاغِرَةٌ</a:t>
@@ -33603,6 +33826,7 @@
                   <a:srgbClr val="1B3B6F"/>
                 </a:solidFill>
                 <a:latin typeface="Amiri" pitchFamily="2" charset="-78"/>
+                <a:ea typeface="Amiri" pitchFamily="2" charset="-78"/>
                 <a:cs typeface="Amiri" pitchFamily="2" charset="-78"/>
               </a:rPr>
               <a:t>إِعْلَانَاتُ وَظَائِفَ</a:t>
@@ -33868,6 +34092,7 @@
                   <a:srgbClr val="1B3B6F"/>
                 </a:solidFill>
                 <a:latin typeface="Amiri" pitchFamily="2" charset="-78"/>
+                <a:ea typeface="Amiri" pitchFamily="2" charset="-78"/>
                 <a:cs typeface="Amiri" pitchFamily="2" charset="-78"/>
               </a:rPr>
               <a:t>طَلَبُ تَوْظِيفٍ</a:t>
@@ -34025,6 +34250,7 @@
                   <a:srgbClr val="1B3B6F"/>
                 </a:solidFill>
                 <a:latin typeface="Amiri" pitchFamily="2" charset="-78"/>
+                <a:ea typeface="Amiri" pitchFamily="2" charset="-78"/>
                 <a:cs typeface="Amiri" pitchFamily="2" charset="-78"/>
               </a:rPr>
               <a:t>مُتَقَدِّمٌ · مُتَقَدِّمَةٌ</a:t>
@@ -34128,6 +34354,7 @@
                   <a:srgbClr val="1B3B6F"/>
                 </a:solidFill>
                 <a:latin typeface="Amiri" pitchFamily="2" charset="-78"/>
+                <a:ea typeface="Amiri" pitchFamily="2" charset="-78"/>
                 <a:cs typeface="Amiri" pitchFamily="2" charset="-78"/>
               </a:rPr>
               <a:t>أَتَقَدَّمُ لِوَظِيفَةٍ</a:t>
@@ -34393,6 +34620,7 @@
                   <a:srgbClr val="1B3B6F"/>
                 </a:solidFill>
                 <a:latin typeface="Amiri" pitchFamily="2" charset="-78"/>
+                <a:ea typeface="Amiri" pitchFamily="2" charset="-78"/>
                 <a:cs typeface="Amiri" pitchFamily="2" charset="-78"/>
               </a:rPr>
               <a:t>سِيرَةٌ ذَاتِيَّةٌ</a:t>
@@ -34550,6 +34778,7 @@
                   <a:srgbClr val="1B3B6F"/>
                 </a:solidFill>
                 <a:latin typeface="Amiri" pitchFamily="2" charset="-78"/>
+                <a:ea typeface="Amiri" pitchFamily="2" charset="-78"/>
                 <a:cs typeface="Amiri" pitchFamily="2" charset="-78"/>
               </a:rPr>
               <a:t>رِسَالَةُ تَقْدِيمٍ</a:t>
@@ -34653,6 +34882,7 @@
                   <a:srgbClr val="1B3B6F"/>
                 </a:solidFill>
                 <a:latin typeface="Amiri" pitchFamily="2" charset="-78"/>
+                <a:ea typeface="Amiri" pitchFamily="2" charset="-78"/>
                 <a:cs typeface="Amiri" pitchFamily="2" charset="-78"/>
               </a:rPr>
               <a:t>سِيَرٌ ذَاتِيَّةٌ</a:t>
@@ -34918,6 +35148,7 @@
                   <a:srgbClr val="1B3B6F"/>
                 </a:solidFill>
                 <a:latin typeface="Amiri" pitchFamily="2" charset="-78"/>
+                <a:ea typeface="Amiri" pitchFamily="2" charset="-78"/>
                 <a:cs typeface="Amiri" pitchFamily="2" charset="-78"/>
               </a:rPr>
               <a:t>مُقَابَلَةٌ</a:t>
@@ -35075,6 +35306,7 @@
                   <a:srgbClr val="1B3B6F"/>
                 </a:solidFill>
                 <a:latin typeface="Amiri" pitchFamily="2" charset="-78"/>
+                <a:ea typeface="Amiri" pitchFamily="2" charset="-78"/>
                 <a:cs typeface="Amiri" pitchFamily="2" charset="-78"/>
               </a:rPr>
               <a:t>المُحَاوِرُ · المُحَاوِرَةُ</a:t>
@@ -35178,6 +35410,7 @@
                   <a:srgbClr val="1B3B6F"/>
                 </a:solidFill>
                 <a:latin typeface="Amiri" pitchFamily="2" charset="-78"/>
+                <a:ea typeface="Amiri" pitchFamily="2" charset="-78"/>
                 <a:cs typeface="Amiri" pitchFamily="2" charset="-78"/>
               </a:rPr>
               <a:t>مُقَابَلَاتٌ</a:t>
@@ -35443,6 +35676,7 @@
                   <a:srgbClr val="1B3B6F"/>
                 </a:solidFill>
                 <a:latin typeface="Amiri" pitchFamily="2" charset="-78"/>
+                <a:ea typeface="Amiri" pitchFamily="2" charset="-78"/>
                 <a:cs typeface="Amiri" pitchFamily="2" charset="-78"/>
               </a:rPr>
               <a:t>خِبْرَةٌ</a:t>
@@ -35600,6 +35834,7 @@
                   <a:srgbClr val="1B3B6F"/>
                 </a:solidFill>
                 <a:latin typeface="Amiri" pitchFamily="2" charset="-78"/>
+                <a:ea typeface="Amiri" pitchFamily="2" charset="-78"/>
                 <a:cs typeface="Amiri" pitchFamily="2" charset="-78"/>
               </a:rPr>
               <a:t>خِبْرَةٌ سَابِقَةٌ</a:t>
@@ -35703,6 +35938,7 @@
                   <a:srgbClr val="1B3B6F"/>
                 </a:solidFill>
                 <a:latin typeface="Amiri" pitchFamily="2" charset="-78"/>
+                <a:ea typeface="Amiri" pitchFamily="2" charset="-78"/>
                 <a:cs typeface="Amiri" pitchFamily="2" charset="-78"/>
               </a:rPr>
               <a:t>خِبْرَاتٌ</a:t>
@@ -35968,6 +36204,7 @@
                   <a:srgbClr val="1B3B6F"/>
                 </a:solidFill>
                 <a:latin typeface="Amiri" pitchFamily="2" charset="-78"/>
+                <a:ea typeface="Amiri" pitchFamily="2" charset="-78"/>
                 <a:cs typeface="Amiri" pitchFamily="2" charset="-78"/>
               </a:rPr>
               <a:t>تَوْصِيَةٌ</a:t>
@@ -36125,6 +36362,7 @@
                   <a:srgbClr val="1B3B6F"/>
                 </a:solidFill>
                 <a:latin typeface="Amiri" pitchFamily="2" charset="-78"/>
+                <a:ea typeface="Amiri" pitchFamily="2" charset="-78"/>
                 <a:cs typeface="Amiri" pitchFamily="2" charset="-78"/>
               </a:rPr>
               <a:t>المُوصِي · المُوصِيَةُ</a:t>
@@ -36228,6 +36466,7 @@
                   <a:srgbClr val="1B3B6F"/>
                 </a:solidFill>
                 <a:latin typeface="Amiri" pitchFamily="2" charset="-78"/>
+                <a:ea typeface="Amiri" pitchFamily="2" charset="-78"/>
                 <a:cs typeface="Amiri" pitchFamily="2" charset="-78"/>
               </a:rPr>
               <a:t>تَوْصِيَاتٌ</a:t>
@@ -36361,6 +36600,7 @@
                   <a:srgbClr val="D4AF37"/>
                 </a:solidFill>
                 <a:latin typeface="Amiri" pitchFamily="2" charset="-78"/>
+                <a:ea typeface="Amiri" pitchFamily="2" charset="-78"/>
                 <a:cs typeface="Amiri" pitchFamily="2" charset="-78"/>
               </a:rPr>
               <a:t>م</a:t>
@@ -36681,6 +36921,7 @@
                   <a:srgbClr val="8A6D1E"/>
                 </a:solidFill>
                 <a:latin typeface="Amiri" pitchFamily="2" charset="-78"/>
+                <a:ea typeface="Amiri" pitchFamily="2" charset="-78"/>
                 <a:cs typeface="Amiri" pitchFamily="2" charset="-78"/>
               </a:rPr>
               <a:t>خِبْرَتِي السَّابِقَةُ</a:t>
@@ -36984,6 +37225,7 @@
                   <a:srgbClr val="1B3B6F"/>
                 </a:solidFill>
                 <a:latin typeface="Amiri" pitchFamily="2" charset="-78"/>
+                <a:ea typeface="Amiri" pitchFamily="2" charset="-78"/>
                 <a:cs typeface="Amiri" pitchFamily="2" charset="-78"/>
               </a:rPr>
               <a:t>عَمِلْتُ · نَظَّمْتُ · تَعَلَّمْتُ</a:t>
@@ -37141,6 +37383,7 @@
                   <a:srgbClr val="1B3B6F"/>
                 </a:solidFill>
                 <a:latin typeface="Amiri" pitchFamily="2" charset="-78"/>
+                <a:ea typeface="Amiri" pitchFamily="2" charset="-78"/>
                 <a:cs typeface="Amiri" pitchFamily="2" charset="-78"/>
               </a:rPr>
               <a:t>عَمِلَتْ · نَظَّمَتْ · تَعَلَّمَتْ</a:t>
@@ -37244,6 +37487,7 @@
                   <a:srgbClr val="1B3B6F"/>
                 </a:solidFill>
                 <a:latin typeface="Amiri" pitchFamily="2" charset="-78"/>
+                <a:ea typeface="Amiri" pitchFamily="2" charset="-78"/>
                 <a:cs typeface="Amiri" pitchFamily="2" charset="-78"/>
               </a:rPr>
               <a:t>عَمِلَ · نَظَّمَ · تَعَلَّمَ</a:t>
@@ -37509,6 +37753,7 @@
                   <a:srgbClr val="1B3B6F"/>
                 </a:solidFill>
                 <a:latin typeface="Amiri" pitchFamily="2" charset="-78"/>
+                <a:ea typeface="Amiri" pitchFamily="2" charset="-78"/>
                 <a:cs typeface="Amiri" pitchFamily="2" charset="-78"/>
               </a:rPr>
               <a:t>أُسَاعِدُهُمْ</a:t>
@@ -37666,6 +37911,7 @@
                   <a:srgbClr val="1B3B6F"/>
                 </a:solidFill>
                 <a:latin typeface="Amiri" pitchFamily="2" charset="-78"/>
+                <a:ea typeface="Amiri" pitchFamily="2" charset="-78"/>
                 <a:cs typeface="Amiri" pitchFamily="2" charset="-78"/>
               </a:rPr>
               <a:t>أُسَاعِدُكُمْ</a:t>
@@ -37769,6 +38015,7 @@
                   <a:srgbClr val="1B3B6F"/>
                 </a:solidFill>
                 <a:latin typeface="Amiri" pitchFamily="2" charset="-78"/>
+                <a:ea typeface="Amiri" pitchFamily="2" charset="-78"/>
                 <a:cs typeface="Amiri" pitchFamily="2" charset="-78"/>
               </a:rPr>
               <a:t>أُسَاعِدُهُ</a:t>
@@ -37872,6 +38119,7 @@
                   <a:srgbClr val="1B3B6F"/>
                 </a:solidFill>
                 <a:latin typeface="Amiri" pitchFamily="2" charset="-78"/>
+                <a:ea typeface="Amiri" pitchFamily="2" charset="-78"/>
                 <a:cs typeface="Amiri" pitchFamily="2" charset="-78"/>
               </a:rPr>
               <a:t>أُسَاعِدُهَا</a:t>
@@ -38137,6 +38385,7 @@
                   <a:srgbClr val="1B3B6F"/>
                 </a:solidFill>
                 <a:latin typeface="Amiri" pitchFamily="2" charset="-78"/>
+                <a:ea typeface="Amiri" pitchFamily="2" charset="-78"/>
                 <a:cs typeface="Amiri" pitchFamily="2" charset="-78"/>
               </a:rPr>
               <a:t>هَلْ يُمْكِنُنِي أَنْ …؟</a:t>
@@ -38294,6 +38543,7 @@
                   <a:srgbClr val="1B3B6F"/>
                 </a:solidFill>
                 <a:latin typeface="Amiri" pitchFamily="2" charset="-78"/>
+                <a:ea typeface="Amiri" pitchFamily="2" charset="-78"/>
                 <a:cs typeface="Amiri" pitchFamily="2" charset="-78"/>
               </a:rPr>
               <a:t>مَا هِيَ …؟</a:t>
@@ -38397,6 +38647,7 @@
                   <a:srgbClr val="1B3B6F"/>
                 </a:solidFill>
                 <a:latin typeface="Amiri" pitchFamily="2" charset="-78"/>
+                <a:ea typeface="Amiri" pitchFamily="2" charset="-78"/>
                 <a:cs typeface="Amiri" pitchFamily="2" charset="-78"/>
               </a:rPr>
               <a:t>هَلْ يُمْكِنُكَ أَنْ …؟</a:t>
@@ -38662,6 +38913,7 @@
                   <a:srgbClr val="1B3B6F"/>
                 </a:solidFill>
                 <a:latin typeface="Amiri" pitchFamily="2" charset="-78"/>
+                <a:ea typeface="Amiri" pitchFamily="2" charset="-78"/>
                 <a:cs typeface="Amiri" pitchFamily="2" charset="-78"/>
               </a:rPr>
               <a:t>رَاتِبٌ شَهْرِيٌّ</a:t>
@@ -38819,6 +39071,7 @@
                   <a:srgbClr val="1B3B6F"/>
                 </a:solidFill>
                 <a:latin typeface="Amiri" pitchFamily="2" charset="-78"/>
+                <a:ea typeface="Amiri" pitchFamily="2" charset="-78"/>
                 <a:cs typeface="Amiri" pitchFamily="2" charset="-78"/>
               </a:rPr>
               <a:t>فَتْرَةُ تَجْرِبَةٍ</a:t>
@@ -38922,6 +39175,7 @@
                   <a:srgbClr val="1B3B6F"/>
                 </a:solidFill>
                 <a:latin typeface="Amiri" pitchFamily="2" charset="-78"/>
+                <a:ea typeface="Amiri" pitchFamily="2" charset="-78"/>
                 <a:cs typeface="Amiri" pitchFamily="2" charset="-78"/>
               </a:rPr>
               <a:t>عَقْدٌ</a:t>
@@ -39187,6 +39441,7 @@
                   <a:srgbClr val="1B3B6F"/>
                 </a:solidFill>
                 <a:latin typeface="Amiri" pitchFamily="2" charset="-78"/>
+                <a:ea typeface="Amiri" pitchFamily="2" charset="-78"/>
                 <a:cs typeface="Amiri" pitchFamily="2" charset="-78"/>
               </a:rPr>
               <a:t>مُتَحَمِّسٌ</a:t>
@@ -39344,6 +39599,7 @@
                   <a:srgbClr val="1B3B6F"/>
                 </a:solidFill>
                 <a:latin typeface="Amiri" pitchFamily="2" charset="-78"/>
+                <a:ea typeface="Amiri" pitchFamily="2" charset="-78"/>
                 <a:cs typeface="Amiri" pitchFamily="2" charset="-78"/>
               </a:rPr>
               <a:t>الحَمَاسُ</a:t>
@@ -39447,6 +39703,7 @@
                   <a:srgbClr val="1B3B6F"/>
                 </a:solidFill>
                 <a:latin typeface="Amiri" pitchFamily="2" charset="-78"/>
+                <a:ea typeface="Amiri" pitchFamily="2" charset="-78"/>
                 <a:cs typeface="Amiri" pitchFamily="2" charset="-78"/>
               </a:rPr>
               <a:t>مُتَحَمِّسَةٌ</a:t>
@@ -39712,6 +39969,7 @@
                   <a:srgbClr val="1B3B6F"/>
                 </a:solidFill>
                 <a:latin typeface="Amiri" pitchFamily="2" charset="-78"/>
+                <a:ea typeface="Amiri" pitchFamily="2" charset="-78"/>
                 <a:cs typeface="Amiri" pitchFamily="2" charset="-78"/>
               </a:rPr>
               <a:t>يَسُرُّنِي أَنْ …</a:t>
@@ -39869,6 +40127,7 @@
                   <a:srgbClr val="1B3B6F"/>
                 </a:solidFill>
                 <a:latin typeface="Amiri" pitchFamily="2" charset="-78"/>
+                <a:ea typeface="Amiri" pitchFamily="2" charset="-78"/>
                 <a:cs typeface="Amiri" pitchFamily="2" charset="-78"/>
               </a:rPr>
               <a:t>شُكْرًا عَلَى وَقْتِكُمْ</a:t>
@@ -39972,6 +40231,7 @@
                   <a:srgbClr val="1B3B6F"/>
                 </a:solidFill>
                 <a:latin typeface="Amiri" pitchFamily="2" charset="-78"/>
+                <a:ea typeface="Amiri" pitchFamily="2" charset="-78"/>
                 <a:cs typeface="Amiri" pitchFamily="2" charset="-78"/>
               </a:rPr>
               <a:t>أَوَدُّ أَنْ</a:t>
@@ -40105,6 +40365,7 @@
                   <a:srgbClr val="D4AF37"/>
                 </a:solidFill>
                 <a:latin typeface="Amiri" pitchFamily="2" charset="-78"/>
+                <a:ea typeface="Amiri" pitchFamily="2" charset="-78"/>
                 <a:cs typeface="Amiri" pitchFamily="2" charset="-78"/>
               </a:rPr>
               <a:t>م</a:t>
@@ -40425,6 +40686,7 @@
                   <a:srgbClr val="8A6D1E"/>
                 </a:solidFill>
                 <a:latin typeface="Amiri" pitchFamily="2" charset="-78"/>
+                <a:ea typeface="Amiri" pitchFamily="2" charset="-78"/>
                 <a:cs typeface="Amiri" pitchFamily="2" charset="-78"/>
               </a:rPr>
               <a:t>فِي الغُرَفِ</a:t>
@@ -41601,6 +41863,7 @@
                   <a:srgbClr val="1B3B6F"/>
                 </a:solidFill>
                 <a:latin typeface="Amiri" pitchFamily="2" charset="-78"/>
+                <a:ea typeface="Amiri" pitchFamily="2" charset="-78"/>
                 <a:cs typeface="Amiri" pitchFamily="2" charset="-78"/>
               </a:rPr>
               <a:t>دَوْرُكَ!</a:t>
@@ -41677,6 +41940,7 @@
                   <a:srgbClr val="1B3B6F"/>
                 </a:solidFill>
                 <a:latin typeface="Amiri" pitchFamily="2" charset="-78"/>
+                <a:ea typeface="Amiri" pitchFamily="2" charset="-78"/>
                 <a:cs typeface="Amiri" pitchFamily="2" charset="-78"/>
               </a:rPr>
               <a:t>أَحْسَنْتَ! / أَحْسَنْتِ!</a:t>
@@ -41753,6 +42017,7 @@
                   <a:srgbClr val="1B3B6F"/>
                 </a:solidFill>
                 <a:latin typeface="Amiri" pitchFamily="2" charset="-78"/>
+                <a:ea typeface="Amiri" pitchFamily="2" charset="-78"/>
                 <a:cs typeface="Amiri" pitchFamily="2" charset="-78"/>
               </a:rPr>
               <a:t>تَكَلَّمْ أَكْثَرَ، مِنْ فَضْلِكَ</a:t>
@@ -41829,6 +42094,7 @@
                   <a:srgbClr val="1B3B6F"/>
                 </a:solidFill>
                 <a:latin typeface="Amiri" pitchFamily="2" charset="-78"/>
+                <a:ea typeface="Amiri" pitchFamily="2" charset="-78"/>
                 <a:cs typeface="Amiri" pitchFamily="2" charset="-78"/>
               </a:rPr>
               <a:t>لِمَاذَا؟</a:t>
@@ -42000,6 +42266,7 @@
                   <a:srgbClr val="D4AF37"/>
                 </a:solidFill>
                 <a:latin typeface="Amiri" pitchFamily="2" charset="-78"/>
+                <a:ea typeface="Amiri" pitchFamily="2" charset="-78"/>
                 <a:cs typeface="Amiri" pitchFamily="2" charset="-78"/>
               </a:rPr>
               <a:t>م</a:t>
@@ -42320,6 +42587,7 @@
                   <a:srgbClr val="8A6D1E"/>
                 </a:solidFill>
                 <a:latin typeface="Amiri" pitchFamily="2" charset="-78"/>
+                <a:ea typeface="Amiri" pitchFamily="2" charset="-78"/>
                 <a:cs typeface="Amiri" pitchFamily="2" charset="-78"/>
               </a:rPr>
               <a:t>اسْتِفْسَارٌ عَنْ وَظِيفَةٍ</a:t>
@@ -42600,6 +42868,7 @@
                   <a:srgbClr val="1B3B6F"/>
                 </a:solidFill>
                 <a:latin typeface="Amiri" pitchFamily="2" charset="-78"/>
+                <a:ea typeface="Amiri" pitchFamily="2" charset="-78"/>
                 <a:cs typeface="Amiri" pitchFamily="2" charset="-78"/>
               </a:rPr>
               <a:t>أَتَّصِلُ بِخُصُوصِ …</a:t>
@@ -42676,6 +42945,7 @@
                   <a:srgbClr val="1B3B6F"/>
                 </a:solidFill>
                 <a:latin typeface="Amiri" pitchFamily="2" charset="-78"/>
+                <a:ea typeface="Amiri" pitchFamily="2" charset="-78"/>
                 <a:cs typeface="Amiri" pitchFamily="2" charset="-78"/>
               </a:rPr>
               <a:t>فُنْدُقُ النَّخِيلِ، صَبَاحَ الخَيْرِ.</a:t>
@@ -42844,6 +43114,7 @@
                   <a:srgbClr val="1B3B6F"/>
                 </a:solidFill>
                 <a:latin typeface="Amiri" pitchFamily="2" charset="-78"/>
+                <a:ea typeface="Amiri" pitchFamily="2" charset="-78"/>
                 <a:cs typeface="Amiri" pitchFamily="2" charset="-78"/>
               </a:rPr>
               <a:t>وَظِيفَةُ …</a:t>
@@ -42920,6 +43191,7 @@
                   <a:srgbClr val="1B3B6F"/>
                 </a:solidFill>
                 <a:latin typeface="Amiri" pitchFamily="2" charset="-78"/>
+                <a:ea typeface="Amiri" pitchFamily="2" charset="-78"/>
                 <a:cs typeface="Amiri" pitchFamily="2" charset="-78"/>
               </a:rPr>
               <a:t>أَيُّ وَظِيفَةٍ؟</a:t>
@@ -43088,6 +43360,7 @@
                   <a:srgbClr val="1B3B6F"/>
                 </a:solidFill>
                 <a:latin typeface="Amiri" pitchFamily="2" charset="-78"/>
+                <a:ea typeface="Amiri" pitchFamily="2" charset="-78"/>
                 <a:cs typeface="Amiri" pitchFamily="2" charset="-78"/>
               </a:rPr>
               <a:t>عُمْرِي …</a:t>
@@ -43164,6 +43437,7 @@
                   <a:srgbClr val="1B3B6F"/>
                 </a:solidFill>
                 <a:latin typeface="Amiri" pitchFamily="2" charset="-78"/>
+                <a:ea typeface="Amiri" pitchFamily="2" charset="-78"/>
                 <a:cs typeface="Amiri" pitchFamily="2" charset="-78"/>
               </a:rPr>
               <a:t>كَمْ عُمْرُكَ؟</a:t>
@@ -43332,6 +43606,7 @@
                   <a:srgbClr val="1B3B6F"/>
                 </a:solidFill>
                 <a:latin typeface="Amiri" pitchFamily="2" charset="-78"/>
+                <a:ea typeface="Amiri" pitchFamily="2" charset="-78"/>
                 <a:cs typeface="Amiri" pitchFamily="2" charset="-78"/>
               </a:rPr>
               <a:t>نَعَمْ، سَأُرْسِلُهَا …</a:t>
@@ -43408,6 +43683,7 @@
                   <a:srgbClr val="1B3B6F"/>
                 </a:solidFill>
                 <a:latin typeface="Amiri" pitchFamily="2" charset="-78"/>
+                <a:ea typeface="Amiri" pitchFamily="2" charset="-78"/>
                 <a:cs typeface="Amiri" pitchFamily="2" charset="-78"/>
               </a:rPr>
               <a:t>هَلْ عِنْدَكَ سِيرَةٌ ذَاتِيَّةٌ؟</a:t>
@@ -43576,6 +43852,7 @@
                   <a:srgbClr val="1B3B6F"/>
                 </a:solidFill>
                 <a:latin typeface="Amiri" pitchFamily="2" charset="-78"/>
+                <a:ea typeface="Amiri" pitchFamily="2" charset="-78"/>
                 <a:cs typeface="Amiri" pitchFamily="2" charset="-78"/>
               </a:rPr>
               <a:t>أَسْتَطِيعُ أَنْ آتِيَ يَوْمَ …</a:t>
@@ -43652,6 +43929,7 @@
                   <a:srgbClr val="1B3B6F"/>
                 </a:solidFill>
                 <a:latin typeface="Amiri" pitchFamily="2" charset="-78"/>
+                <a:ea typeface="Amiri" pitchFamily="2" charset="-78"/>
                 <a:cs typeface="Amiri" pitchFamily="2" charset="-78"/>
               </a:rPr>
               <a:t>مَتَى تَسْتَطِيعُ أَنْ تَأْتِيَ لِلْمُقَابَلَةِ؟</a:t>
@@ -43926,6 +44204,7 @@
                   <a:srgbClr val="D4AF37"/>
                 </a:solidFill>
                 <a:latin typeface="Amiri" pitchFamily="2" charset="-78"/>
+                <a:ea typeface="Amiri" pitchFamily="2" charset="-78"/>
                 <a:cs typeface="Amiri" pitchFamily="2" charset="-78"/>
               </a:rPr>
               <a:t>م</a:t>
@@ -44246,6 +44525,7 @@
                   <a:srgbClr val="8A6D1E"/>
                 </a:solidFill>
                 <a:latin typeface="Amiri" pitchFamily="2" charset="-78"/>
+                <a:ea typeface="Amiri" pitchFamily="2" charset="-78"/>
                 <a:cs typeface="Amiri" pitchFamily="2" charset="-78"/>
               </a:rPr>
               <a:t>مُقَابَلَةٌ فِي مَحَلٍّ</a:t>
@@ -44526,6 +44806,7 @@
                   <a:srgbClr val="1B3B6F"/>
                 </a:solidFill>
                 <a:latin typeface="Amiri" pitchFamily="2" charset="-78"/>
+                <a:ea typeface="Amiri" pitchFamily="2" charset="-78"/>
                 <a:cs typeface="Amiri" pitchFamily="2" charset="-78"/>
               </a:rPr>
               <a:t>لِأَنِّي أُحِبُّ … وَأُرِيدُ أَنْ …</a:t>
@@ -44602,6 +44883,7 @@
                   <a:srgbClr val="1B3B6F"/>
                 </a:solidFill>
                 <a:latin typeface="Amiri" pitchFamily="2" charset="-78"/>
+                <a:ea typeface="Amiri" pitchFamily="2" charset="-78"/>
                 <a:cs typeface="Amiri" pitchFamily="2" charset="-78"/>
               </a:rPr>
               <a:t>تَفَضَّلْ بِالجُلُوسِ. لِمَاذَا تُرِيدُ هٰذِهِ الوَظِيفَةَ؟</a:t>
@@ -44770,6 +45052,7 @@
                   <a:srgbClr val="1B3B6F"/>
                 </a:solidFill>
                 <a:latin typeface="Amiri" pitchFamily="2" charset="-78"/>
+                <a:ea typeface="Amiri" pitchFamily="2" charset="-78"/>
                 <a:cs typeface="Amiri" pitchFamily="2" charset="-78"/>
               </a:rPr>
               <a:t>نَعَمْ، عَمِلْتُ فِي …</a:t>
@@ -44846,6 +45129,7 @@
                   <a:srgbClr val="1B3B6F"/>
                 </a:solidFill>
                 <a:latin typeface="Amiri" pitchFamily="2" charset="-78"/>
+                <a:ea typeface="Amiri" pitchFamily="2" charset="-78"/>
                 <a:cs typeface="Amiri" pitchFamily="2" charset="-78"/>
               </a:rPr>
               <a:t>هَلْ عَمِلْتَ مِنْ قَبْلُ؟</a:t>
@@ -45014,6 +45298,7 @@
                   <a:srgbClr val="1B3B6F"/>
                 </a:solidFill>
                 <a:latin typeface="Amiri" pitchFamily="2" charset="-78"/>
+                <a:ea typeface="Amiri" pitchFamily="2" charset="-78"/>
                 <a:cs typeface="Amiri" pitchFamily="2" charset="-78"/>
               </a:rPr>
               <a:t>كُنْتُ أَبِيعُ … وَأُرَتِّبُهُ …</a:t>
@@ -45090,6 +45375,7 @@
                   <a:srgbClr val="1B3B6F"/>
                 </a:solidFill>
                 <a:latin typeface="Amiri" pitchFamily="2" charset="-78"/>
+                <a:ea typeface="Amiri" pitchFamily="2" charset="-78"/>
                 <a:cs typeface="Amiri" pitchFamily="2" charset="-78"/>
               </a:rPr>
               <a:t>وَمَاذَا كُنْتَ تَفْعَلُ هُنَاكَ؟</a:t>
@@ -45193,6 +45479,7 @@
                   <a:srgbClr val="1B3B6F"/>
                 </a:solidFill>
                 <a:latin typeface="Amiri" pitchFamily="2" charset="-78"/>
+                <a:ea typeface="Amiri" pitchFamily="2" charset="-78"/>
                 <a:cs typeface="Amiri" pitchFamily="2" charset="-78"/>
               </a:rPr>
               <a:t>هَلْ يُمْكِنُنِي أَنْ أَسْأَلَ عَنْ …؟</a:t>
@@ -45269,6 +45556,7 @@
                   <a:srgbClr val="1B3B6F"/>
                 </a:solidFill>
                 <a:latin typeface="Amiri" pitchFamily="2" charset="-78"/>
+                <a:ea typeface="Amiri" pitchFamily="2" charset="-78"/>
                 <a:cs typeface="Amiri" pitchFamily="2" charset="-78"/>
               </a:rPr>
               <a:t>هَلْ عِنْدَكَ أَسْئِلَةٌ؟</a:t>
@@ -45372,6 +45660,7 @@
                   <a:srgbClr val="1B3B6F"/>
                 </a:solidFill>
                 <a:latin typeface="Amiri" pitchFamily="2" charset="-78"/>
+                <a:ea typeface="Amiri" pitchFamily="2" charset="-78"/>
                 <a:cs typeface="Amiri" pitchFamily="2" charset="-78"/>
               </a:rPr>
               <a:t>أَنَا … فَمَثَلًا …</a:t>
@@ -45448,6 +45737,7 @@
                   <a:srgbClr val="1B3B6F"/>
                 </a:solidFill>
                 <a:latin typeface="Amiri" pitchFamily="2" charset="-78"/>
+                <a:ea typeface="Amiri" pitchFamily="2" charset="-78"/>
                 <a:cs typeface="Amiri" pitchFamily="2" charset="-78"/>
               </a:rPr>
               <a:t>مَا أَكْبَرُ نُقْطَةِ قُوَّةٍ عِنْدَكَ؟</a:t>
@@ -45622,13 +45912,9 @@
     <a:fontScheme name="Office">
       <a:majorFont>
         <a:latin typeface="Calibri Light" panose="020F0302020204030204"/>
-        <a:ea typeface=""/>
-        <a:cs typeface=""/>
-        <a:font script="Jpan" typeface="游ゴシック Light"/>
-        <a:font script="Hang" typeface="맑은 고딕"/>
-        <a:font script="Hans" typeface="等线 Light"/>
-        <a:font script="Hant" typeface="新細明體"/>
-        <a:font script="Arab" typeface="Times New Roman"/>
+        <a:ea typeface="Amiri" pitchFamily="2" charset="-78"/>
+        <a:cs typeface="Amiri" pitchFamily="2" charset="-78"/>
+        <a:font script="Arab" typeface="Amiri"/>
         <a:font script="Hebr" typeface="Times New Roman"/>
         <a:font script="Thai" typeface="Angsana New"/>
         <a:font script="Ethi" typeface="Nyala"/>
@@ -45674,13 +45960,9 @@
       </a:majorFont>
       <a:minorFont>
         <a:latin typeface="Calibri" panose="020F0502020204030204"/>
-        <a:ea typeface=""/>
-        <a:cs typeface=""/>
-        <a:font script="Jpan" typeface="游ゴシック"/>
-        <a:font script="Hang" typeface="맑은 고딕"/>
-        <a:font script="Hans" typeface="等线"/>
-        <a:font script="Hant" typeface="新細明體"/>
-        <a:font script="Arab" typeface="Arial"/>
+        <a:ea typeface="Amiri" pitchFamily="2" charset="-78"/>
+        <a:cs typeface="Amiri" pitchFamily="2" charset="-78"/>
+        <a:font script="Arab" typeface="Amiri"/>
         <a:font script="Hebr" typeface="Arial"/>
         <a:font script="Thai" typeface="Cordia New"/>
         <a:font script="Ethi" typeface="Nyala"/>
